--- a/Topic_B/Exam_Practice/TB-L03_Speaking_Workshop_Appearance_and_Personality.pptx
+++ b/Topic_B/Exam_Practice/TB-L03_Speaking_Workshop_Appearance_and_Personality.pptx
@@ -615,7 +615,11 @@
           <a:lstStyle/>
           <a:p>
             <a:r>
-              <a:rPr lang="en-US" dirty="0"/>
+              <a:rPr lang="ar-SA" dirty="0">
+                <a:latin typeface="Amiri" pitchFamily="2" charset="-78"/>
+                <a:ea typeface="Amiri" pitchFamily="2" charset="-78"/>
+                <a:cs typeface="Amiri" pitchFamily="2" charset="-78"/>
+              </a:rPr>
               <a:t>ROLE PLAY C (Develop) — choosing a team captain.
 SET-UP IN THE BREAKOUT ROOM: A = examiner (reads the left column ONLY — the questions, in order), B = candidate (sees the task column; Core may use the help column), C = observer (ticks the feedback checklist). 1 minute preparation, about 3 minutes speaking, 1 minute feedback, then rotate.
 Task ! is the unexpected question: in the exam the candidate has not seen it — the examiner should read it without warning.
@@ -707,7 +711,11 @@
           <a:lstStyle/>
           <a:p>
             <a:r>
-              <a:rPr lang="en-US" dirty="0"/>
+              <a:rPr lang="ar-SA" dirty="0">
+                <a:latin typeface="Amiri" pitchFamily="2" charset="-78"/>
+                <a:ea typeface="Amiri" pitchFamily="2" charset="-78"/>
+                <a:cs typeface="Amiri" pitchFamily="2" charset="-78"/>
+              </a:rPr>
               <a:t>ROLE PLAY D (Stretch) — a magazine interview.
 SET-UP IN THE BREAKOUT ROOM: A = examiner (reads the left column ONLY — the questions, in order), B = candidate (sees the task column; Core may use the help column), C = observer (ticks the feedback checklist). 1 minute preparation, about 3 minutes speaking, 1 minute feedback, then rotate.
 Task ! is the unexpected question: in the exam the candidate has not seen it — the examiner should read it without warning.
@@ -1243,7 +1251,11 @@
           <a:lstStyle/>
           <a:p>
             <a:r>
-              <a:rPr lang="en-US" dirty="0"/>
+              <a:rPr lang="ar-SA" dirty="0">
+                <a:latin typeface="Amiri" pitchFamily="2" charset="-78"/>
+                <a:ea typeface="Amiri" pitchFamily="2" charset="-78"/>
+                <a:cs typeface="Amiri" pitchFamily="2" charset="-78"/>
+              </a:rPr>
               <a:t>TOPIC CONVERSATION — Core. Examiner asks the questions in order and may add “لِمَاذَا؟ / هَلْ يُمْكِنُ أَنْ تَشْرَحَ أَكْثَرَ؟” to push for more. Candidate aims for one full sentence per question.
 </a:t>
             </a:r>
@@ -1332,7 +1344,11 @@
           <a:lstStyle/>
           <a:p>
             <a:r>
-              <a:rPr lang="en-US" dirty="0"/>
+              <a:rPr lang="ar-SA" dirty="0">
+                <a:latin typeface="Amiri" pitchFamily="2" charset="-78"/>
+                <a:ea typeface="Amiri" pitchFamily="2" charset="-78"/>
+                <a:cs typeface="Amiri" pitchFamily="2" charset="-78"/>
+              </a:rPr>
               <a:t>TOPIC CONVERSATION — Develop. Examiner asks the questions in order and may add “لِمَاذَا؟ / هَلْ يُمْكِنُ أَنْ تَشْرَحَ أَكْثَرَ؟” to push for more. Candidate aims for two or three sentences, with an example.
 </a:t>
             </a:r>
@@ -1421,7 +1437,11 @@
           <a:lstStyle/>
           <a:p>
             <a:r>
-              <a:rPr lang="en-US" dirty="0"/>
+              <a:rPr lang="ar-SA" dirty="0">
+                <a:latin typeface="Amiri" pitchFamily="2" charset="-78"/>
+                <a:ea typeface="Amiri" pitchFamily="2" charset="-78"/>
+                <a:cs typeface="Amiri" pitchFamily="2" charset="-78"/>
+              </a:rPr>
               <a:t>TOPIC CONVERSATION — Stretch. Examiner asks the questions in order and may add “لِمَاذَا؟ / هَلْ يُمْكِنُ أَنْ تَشْرَحَ أَكْثَرَ؟” to push for more. Candidate aims for a developed answer: opinion, comparison, concession and a conditional.
 </a:t>
             </a:r>
@@ -1510,7 +1530,11 @@
           <a:lstStyle/>
           <a:p>
             <a:r>
-              <a:rPr lang="en-US" dirty="0"/>
+              <a:rPr lang="ar-SA" dirty="0">
+                <a:latin typeface="Amiri" pitchFamily="2" charset="-78"/>
+                <a:ea typeface="Amiri" pitchFamily="2" charset="-78"/>
+                <a:cs typeface="Amiri" pitchFamily="2" charset="-78"/>
+              </a:rPr>
               <a:t>WELCOME (1 min) — while students join.
 • Greet each student by name as they arrive: السَّلَامُ عَلَيْكُمْ. Take the register (Pastoral Tracker: attendance 0/1).
 • 2-MINUTE CHECK-IN (SEND training): a private chat to any student who seemed unsettled last lesson — “Are you okay today? 👍 / 👎”.
@@ -2224,7 +2248,11 @@
           <a:lstStyle/>
           <a:p>
             <a:r>
-              <a:rPr lang="en-US" dirty="0"/>
+              <a:rPr lang="ar-SA" dirty="0">
+                <a:latin typeface="Amiri" pitchFamily="2" charset="-78"/>
+                <a:ea typeface="Amiri" pitchFamily="2" charset="-78"/>
+                <a:cs typeface="Amiri" pitchFamily="2" charset="-78"/>
+              </a:rPr>
               <a:t>TEACH (3 min). Role play = precise and complete; conversation = develop. Choral repetition of the repair phrases. To a girl: تُعِيدِي.</a:t>
             </a:r>
             <a:endParaRPr lang="en-US" dirty="0"/>
@@ -2312,7 +2340,11 @@
           <a:lstStyle/>
           <a:p>
             <a:r>
-              <a:rPr lang="en-US" dirty="0"/>
+              <a:rPr lang="ar-SA" dirty="0">
+                <a:latin typeface="Amiri" pitchFamily="2" charset="-78"/>
+                <a:ea typeface="Amiri" pitchFamily="2" charset="-78"/>
+                <a:cs typeface="Amiri" pitchFamily="2" charset="-78"/>
+              </a:rPr>
               <a:t>LANGUAGE BANK (2 min) — adjectives agree in gender: هُوَ طَوِيلٌ · هِيَ طَوِيلَةٌ. Eyes are a dual: عَيْنَاهَا خَضْرَاوَانِ. laysa takes the accusative: لَيْسَ طَوِيلًا.</a:t>
             </a:r>
             <a:endParaRPr lang="en-US" dirty="0"/>
@@ -2400,7 +2432,11 @@
           <a:lstStyle/>
           <a:p>
             <a:r>
-              <a:rPr lang="en-US" dirty="0"/>
+              <a:rPr lang="ar-SA" dirty="0">
+                <a:latin typeface="Amiri" pitchFamily="2" charset="-78"/>
+                <a:ea typeface="Amiri" pitchFamily="2" charset="-78"/>
+                <a:cs typeface="Amiri" pitchFamily="2" charset="-78"/>
+              </a:rPr>
               <a:t>LANGUAGE BANK (2 min) — the relative pronoun agrees with the person: الصَّدِيقُ الَّذِي … · الصَّدِيقَةُ الَّتِي … · الأَصْدِقَاءُ الَّذِينَ … Broken plurals of people: لُطَفَاءُ · أَذْكِيَاءُ · كِرَامٌ.</a:t>
             </a:r>
             <a:endParaRPr lang="en-US" dirty="0"/>
@@ -2576,7 +2612,11 @@
           <a:lstStyle/>
           <a:p>
             <a:r>
-              <a:rPr lang="en-US" dirty="0"/>
+              <a:rPr lang="ar-SA" dirty="0">
+                <a:latin typeface="Amiri" pitchFamily="2" charset="-78"/>
+                <a:ea typeface="Amiri" pitchFamily="2" charset="-78"/>
+                <a:cs typeface="Amiri" pitchFamily="2" charset="-78"/>
+              </a:rPr>
               <a:t>ROLE PLAY A (Core) — a lost child.
 SET-UP IN THE BREAKOUT ROOM: A = examiner (reads the left column ONLY — the questions, in order), B = candidate (sees the task column; Core may use the help column), C = observer (ticks the feedback checklist). 1 minute preparation, about 3 minutes speaking, 1 minute feedback, then rotate.
 Task ! is the unexpected question: in the exam the candidate has not seen it — the examiner should read it without warning.
@@ -2668,7 +2708,11 @@
           <a:lstStyle/>
           <a:p>
             <a:r>
-              <a:rPr lang="en-US" dirty="0"/>
+              <a:rPr lang="ar-SA" dirty="0">
+                <a:latin typeface="Amiri" pitchFamily="2" charset="-78"/>
+                <a:ea typeface="Amiri" pitchFamily="2" charset="-78"/>
+                <a:cs typeface="Amiri" pitchFamily="2" charset="-78"/>
+              </a:rPr>
               <a:t>ROLE PLAY B (Core+) — a new teacher.
 SET-UP IN THE BREAKOUT ROOM: A = examiner (reads the left column ONLY — the questions, in order), B = candidate (sees the task column; Core may use the help column), C = observer (ticks the feedback checklist). 1 minute preparation, about 3 minutes speaking, 1 minute feedback, then rotate.
 Task ! is the unexpected question: in the exam the candidate has not seen it — the examiner should read it without warning.
@@ -3156,6 +3200,7 @@
                   <a:srgbClr val="D4AF37"/>
                 </a:solidFill>
                 <a:latin typeface="Amiri" pitchFamily="2" charset="-78"/>
+                <a:ea typeface="Amiri" pitchFamily="2" charset="-78"/>
                 <a:cs typeface="Amiri" pitchFamily="2" charset="-78"/>
               </a:rPr>
               <a:t>م</a:t>
@@ -3362,6 +3407,7 @@
                   <a:srgbClr val="D4AF37"/>
                 </a:solidFill>
                 <a:latin typeface="Amiri" pitchFamily="2" charset="-78"/>
+                <a:ea typeface="Amiri" pitchFamily="2" charset="-78"/>
                 <a:cs typeface="Amiri" pitchFamily="2" charset="-78"/>
               </a:rPr>
               <a:t>وَرْشَةُ التَّحَدُّثِ — المَظْهَرُ وَالشَّخْصِيَّةُ</a:t>
@@ -3819,6 +3865,7 @@
                   <a:srgbClr val="D4AF37"/>
                 </a:solidFill>
                 <a:latin typeface="Amiri" pitchFamily="2" charset="-78"/>
+                <a:ea typeface="Amiri" pitchFamily="2" charset="-78"/>
                 <a:cs typeface="Amiri" pitchFamily="2" charset="-78"/>
               </a:rPr>
               <a:t>م</a:t>
@@ -4139,6 +4186,7 @@
                   <a:srgbClr val="8A6D1E"/>
                 </a:solidFill>
                 <a:latin typeface="Amiri" pitchFamily="2" charset="-78"/>
+                <a:ea typeface="Amiri" pitchFamily="2" charset="-78"/>
                 <a:cs typeface="Amiri" pitchFamily="2" charset="-78"/>
               </a:rPr>
               <a:t>مَنْ يَكُونُ قَائِدَ الفَرِيقِ؟</a:t>
@@ -4419,6 +4467,7 @@
                   <a:srgbClr val="1B3B6F"/>
                 </a:solidFill>
                 <a:latin typeface="Amiri" pitchFamily="2" charset="-78"/>
+                <a:ea typeface="Amiri" pitchFamily="2" charset="-78"/>
                 <a:cs typeface="Amiri" pitchFamily="2" charset="-78"/>
               </a:rPr>
               <a:t>أَقْتَرِحُ … الَّذِي / الَّتِي …</a:t>
@@ -4495,6 +4544,7 @@
                   <a:srgbClr val="1B3B6F"/>
                 </a:solidFill>
                 <a:latin typeface="Amiri" pitchFamily="2" charset="-78"/>
+                <a:ea typeface="Amiri" pitchFamily="2" charset="-78"/>
                 <a:cs typeface="Amiri" pitchFamily="2" charset="-78"/>
               </a:rPr>
               <a:t>مَنْ تَقْتَرِحُ قَائِدًا لِلْفَرِيقِ؟</a:t>
@@ -4598,6 +4648,7 @@
                   <a:srgbClr val="1B3B6F"/>
                 </a:solidFill>
                 <a:latin typeface="Amiri" pitchFamily="2" charset="-78"/>
+                <a:ea typeface="Amiri" pitchFamily="2" charset="-78"/>
                 <a:cs typeface="Amiri" pitchFamily="2" charset="-78"/>
               </a:rPr>
               <a:t>لِأَنَّهَا … وَ…</a:t>
@@ -4674,6 +4725,7 @@
                   <a:srgbClr val="1B3B6F"/>
                 </a:solidFill>
                 <a:latin typeface="Amiri" pitchFamily="2" charset="-78"/>
+                <a:ea typeface="Amiri" pitchFamily="2" charset="-78"/>
                 <a:cs typeface="Amiri" pitchFamily="2" charset="-78"/>
               </a:rPr>
               <a:t>لِمَاذَا هِيَ؟</a:t>
@@ -4777,6 +4829,7 @@
                   <a:srgbClr val="1B3B6F"/>
                 </a:solidFill>
                 <a:latin typeface="Amiri" pitchFamily="2" charset="-78"/>
+                <a:ea typeface="Amiri" pitchFamily="2" charset="-78"/>
                 <a:cs typeface="Amiri" pitchFamily="2" charset="-78"/>
               </a:rPr>
               <a:t>فِي المُبَارَاةِ المَاضِيَةِ …</a:t>
@@ -4853,6 +4906,7 @@
                   <a:srgbClr val="1B3B6F"/>
                 </a:solidFill>
                 <a:latin typeface="Amiri" pitchFamily="2" charset="-78"/>
+                <a:ea typeface="Amiri" pitchFamily="2" charset="-78"/>
                 <a:cs typeface="Amiri" pitchFamily="2" charset="-78"/>
               </a:rPr>
               <a:t>أَعْطِنِي مِثَالًا.</a:t>
@@ -4956,6 +5010,7 @@
                   <a:srgbClr val="1B3B6F"/>
                 </a:solidFill>
                 <a:latin typeface="Amiri" pitchFamily="2" charset="-78"/>
+                <a:ea typeface="Amiri" pitchFamily="2" charset="-78"/>
                 <a:cs typeface="Amiri" pitchFamily="2" charset="-78"/>
               </a:rPr>
               <a:t>صَحِيحٌ، لٰكِنَّ القَائِدَ لَيْسَ …</a:t>
@@ -5032,6 +5087,7 @@
                   <a:srgbClr val="1B3B6F"/>
                 </a:solidFill>
                 <a:latin typeface="Amiri" pitchFamily="2" charset="-78"/>
+                <a:ea typeface="Amiri" pitchFamily="2" charset="-78"/>
                 <a:cs typeface="Amiri" pitchFamily="2" charset="-78"/>
               </a:rPr>
               <a:t>لٰكِنَّهَا لَيْسَتْ أَفْضَلَ لَاعِبَةٍ.</a:t>
@@ -5135,6 +5191,7 @@
                   <a:srgbClr val="1B3B6F"/>
                 </a:solidFill>
                 <a:latin typeface="Amiri" pitchFamily="2" charset="-78"/>
+                <a:ea typeface="Amiri" pitchFamily="2" charset="-78"/>
                 <a:cs typeface="Amiri" pitchFamily="2" charset="-78"/>
               </a:rPr>
               <a:t>رُبَّمَا، لِأَنِّي … لٰكِنِّي …</a:t>
@@ -5211,6 +5268,7 @@
                   <a:srgbClr val="1B3B6F"/>
                 </a:solidFill>
                 <a:latin typeface="Amiri" pitchFamily="2" charset="-78"/>
+                <a:ea typeface="Amiri" pitchFamily="2" charset="-78"/>
                 <a:cs typeface="Amiri" pitchFamily="2" charset="-78"/>
               </a:rPr>
               <a:t>وَأَنْتَ، هَلْ تَصْلُحُ قَائِدًا؟</a:t>
@@ -5420,6 +5478,7 @@
                   <a:srgbClr val="D4AF37"/>
                 </a:solidFill>
                 <a:latin typeface="Amiri" pitchFamily="2" charset="-78"/>
+                <a:ea typeface="Amiri" pitchFamily="2" charset="-78"/>
                 <a:cs typeface="Amiri" pitchFamily="2" charset="-78"/>
               </a:rPr>
               <a:t>م</a:t>
@@ -5740,6 +5799,7 @@
                   <a:srgbClr val="8A6D1E"/>
                 </a:solidFill>
                 <a:latin typeface="Amiri" pitchFamily="2" charset="-78"/>
+                <a:ea typeface="Amiri" pitchFamily="2" charset="-78"/>
                 <a:cs typeface="Amiri" pitchFamily="2" charset="-78"/>
               </a:rPr>
               <a:t>هَلِ المَظْهَرُ مُهِمٌّ؟</a:t>
@@ -6020,6 +6080,7 @@
                   <a:srgbClr val="1B3B6F"/>
                 </a:solidFill>
                 <a:latin typeface="Amiri" pitchFamily="2" charset="-78"/>
+                <a:ea typeface="Amiri" pitchFamily="2" charset="-78"/>
                 <a:cs typeface="Amiri" pitchFamily="2" charset="-78"/>
               </a:rPr>
               <a:t>لِلْأَسَفِ نَعَمْ، لِأَنَّ …</a:t>
@@ -6096,6 +6157,7 @@
                   <a:srgbClr val="1B3B6F"/>
                 </a:solidFill>
                 <a:latin typeface="Amiri" pitchFamily="2" charset="-78"/>
+                <a:ea typeface="Amiri" pitchFamily="2" charset="-78"/>
                 <a:cs typeface="Amiri" pitchFamily="2" charset="-78"/>
               </a:rPr>
               <a:t>هَلْ نَحْكُمُ عَلَى النَّاسِ مِنْ مَظْهَرِهِمْ؟</a:t>
@@ -6199,6 +6261,7 @@
                   <a:srgbClr val="1B3B6F"/>
                 </a:solidFill>
                 <a:latin typeface="Amiri" pitchFamily="2" charset="-78"/>
+                <a:ea typeface="Amiri" pitchFamily="2" charset="-78"/>
                 <a:cs typeface="Amiri" pitchFamily="2" charset="-78"/>
               </a:rPr>
               <a:t>نَعَمْ، ظَنَنْتُ أَنَّ … لٰكِنْ …</a:t>
@@ -6275,6 +6338,7 @@
                   <a:srgbClr val="1B3B6F"/>
                 </a:solidFill>
                 <a:latin typeface="Amiri" pitchFamily="2" charset="-78"/>
+                <a:ea typeface="Amiri" pitchFamily="2" charset="-78"/>
                 <a:cs typeface="Amiri" pitchFamily="2" charset="-78"/>
               </a:rPr>
               <a:t>هَلْ حَكَمْتَ عَلَى شَخْصٍ خَطَأً مَرَّةً؟</a:t>
@@ -6378,6 +6442,7 @@
                   <a:srgbClr val="1B3B6F"/>
                 </a:solidFill>
                 <a:latin typeface="Amiri" pitchFamily="2" charset="-78"/>
+                <a:ea typeface="Amiri" pitchFamily="2" charset="-78"/>
                 <a:cs typeface="Amiri" pitchFamily="2" charset="-78"/>
               </a:rPr>
               <a:t>تَجْعَلُ … يَظُنُّونَ أَنَّ …</a:t>
@@ -6454,6 +6519,7 @@
                   <a:srgbClr val="1B3B6F"/>
                 </a:solidFill>
                 <a:latin typeface="Amiri" pitchFamily="2" charset="-78"/>
+                <a:ea typeface="Amiri" pitchFamily="2" charset="-78"/>
                 <a:cs typeface="Amiri" pitchFamily="2" charset="-78"/>
               </a:rPr>
               <a:t>مَا تَأْثِيرُ وَسَائِلِ التَّوَاصُلِ عَلَى نَظْرَتِنَا إِلَى الجَمَالِ؟</a:t>
@@ -6557,6 +6623,7 @@
                   <a:srgbClr val="1B3B6F"/>
                 </a:solidFill>
                 <a:latin typeface="Amiri" pitchFamily="2" charset="-78"/>
+                <a:ea typeface="Amiri" pitchFamily="2" charset="-78"/>
                 <a:cs typeface="Amiri" pitchFamily="2" charset="-78"/>
               </a:rPr>
               <a:t>صَحِيحٌ أَنَّ … غَيْرَ أَنَّ …</a:t>
@@ -6633,6 +6700,7 @@
                   <a:srgbClr val="1B3B6F"/>
                 </a:solidFill>
                 <a:latin typeface="Amiri" pitchFamily="2" charset="-78"/>
+                <a:ea typeface="Amiri" pitchFamily="2" charset="-78"/>
                 <a:cs typeface="Amiri" pitchFamily="2" charset="-78"/>
               </a:rPr>
               <a:t>أَلَيْسَ مِنَ الطَّبِيعِيِّ أَنْ نَهْتَمَّ بِمَظْهَرِنَا؟</a:t>
@@ -6736,6 +6804,7 @@
                   <a:srgbClr val="1B3B6F"/>
                 </a:solidFill>
                 <a:latin typeface="Amiri" pitchFamily="2" charset="-78"/>
+                <a:ea typeface="Amiri" pitchFamily="2" charset="-78"/>
                 <a:cs typeface="Amiri" pitchFamily="2" charset="-78"/>
               </a:rPr>
               <a:t>لَوِ اسْتَطَعْتُ، لَأَصْبَحْتُ …</a:t>
@@ -6812,6 +6881,7 @@
                   <a:srgbClr val="1B3B6F"/>
                 </a:solidFill>
                 <a:latin typeface="Amiri" pitchFamily="2" charset="-78"/>
+                <a:ea typeface="Amiri" pitchFamily="2" charset="-78"/>
                 <a:cs typeface="Amiri" pitchFamily="2" charset="-78"/>
               </a:rPr>
               <a:t>لَوِ اسْتَطَعْتَ أَنْ تُغَيِّرَ صِفَةً فِي شَخْصِيَّتِكَ، فَمَا هِيَ؟</a:t>
@@ -7021,6 +7091,7 @@
                   <a:srgbClr val="D4AF37"/>
                 </a:solidFill>
                 <a:latin typeface="Amiri" pitchFamily="2" charset="-78"/>
+                <a:ea typeface="Amiri" pitchFamily="2" charset="-78"/>
                 <a:cs typeface="Amiri" pitchFamily="2" charset="-78"/>
               </a:rPr>
               <a:t>م</a:t>
@@ -7341,6 +7412,7 @@
                   <a:srgbClr val="8A6D1E"/>
                 </a:solidFill>
                 <a:latin typeface="Amiri" pitchFamily="2" charset="-78"/>
+                <a:ea typeface="Amiri" pitchFamily="2" charset="-78"/>
                 <a:cs typeface="Amiri" pitchFamily="2" charset="-78"/>
               </a:rPr>
               <a:t>وَرَقَةُ المُلَاحِظِ</a:t>
@@ -8811,6 +8883,7 @@
                   <a:srgbClr val="D4AF37"/>
                 </a:solidFill>
                 <a:latin typeface="Amiri" pitchFamily="2" charset="-78"/>
+                <a:ea typeface="Amiri" pitchFamily="2" charset="-78"/>
                 <a:cs typeface="Amiri" pitchFamily="2" charset="-78"/>
               </a:rPr>
               <a:t>م</a:t>
@@ -9131,6 +9204,7 @@
                   <a:srgbClr val="8A6D1E"/>
                 </a:solidFill>
                 <a:latin typeface="Amiri" pitchFamily="2" charset="-78"/>
+                <a:ea typeface="Amiri" pitchFamily="2" charset="-78"/>
                 <a:cs typeface="Amiri" pitchFamily="2" charset="-78"/>
               </a:rPr>
               <a:t>نَمُوذَجُ الإِجَابَةِ</a:t>
@@ -9373,6 +9447,7 @@
                   <a:srgbClr val="1B3B6F"/>
                 </a:solidFill>
                 <a:latin typeface="Amiri" pitchFamily="2" charset="-78"/>
+                <a:ea typeface="Amiri" pitchFamily="2" charset="-78"/>
                 <a:cs typeface="Amiri" pitchFamily="2" charset="-78"/>
               </a:rPr>
               <a:t>أَخِي الصَّغِيرُ ضَائِعٌ، كَانَ مَعِي قَبْلَ عَشْرِ دَقَائِقَ.</a:t>
@@ -9449,6 +9524,7 @@
                   <a:srgbClr val="1B3B6F"/>
                 </a:solidFill>
                 <a:latin typeface="Amiri" pitchFamily="2" charset="-78"/>
+                <a:ea typeface="Amiri" pitchFamily="2" charset="-78"/>
                 <a:cs typeface="Amiri" pitchFamily="2" charset="-78"/>
               </a:rPr>
               <a:t>مَا المُشْكِلَةُ؟</a:t>
@@ -9552,6 +9628,7 @@
                   <a:srgbClr val="1B3B6F"/>
                 </a:solidFill>
                 <a:latin typeface="Amiri" pitchFamily="2" charset="-78"/>
+                <a:ea typeface="Amiri" pitchFamily="2" charset="-78"/>
                 <a:cs typeface="Amiri" pitchFamily="2" charset="-78"/>
               </a:rPr>
               <a:t>اسْمُهُ زَيْدٌ، وَعُمْرُهُ سِتُّ سَنَوَاتٍ.</a:t>
@@ -9628,6 +9705,7 @@
                   <a:srgbClr val="1B3B6F"/>
                 </a:solidFill>
                 <a:latin typeface="Amiri" pitchFamily="2" charset="-78"/>
+                <a:ea typeface="Amiri" pitchFamily="2" charset="-78"/>
                 <a:cs typeface="Amiri" pitchFamily="2" charset="-78"/>
               </a:rPr>
               <a:t>كَمْ عُمْرُهُ؟ وَمَا اسْمُهُ؟</a:t>
@@ -9731,6 +9809,7 @@
                   <a:srgbClr val="1B3B6F"/>
                 </a:solidFill>
                 <a:latin typeface="Amiri" pitchFamily="2" charset="-78"/>
+                <a:ea typeface="Amiri" pitchFamily="2" charset="-78"/>
                 <a:cs typeface="Amiri" pitchFamily="2" charset="-78"/>
               </a:rPr>
               <a:t>هُوَ قَصِيرٌ وَنَحِيفٌ، وَشَعْرُهُ أَسْوَدُ وَقَصِيرٌ، وَعَيْنَاهُ بُنِّيَّتَانِ.</a:t>
@@ -9807,6 +9886,7 @@
                   <a:srgbClr val="1B3B6F"/>
                 </a:solidFill>
                 <a:latin typeface="Amiri" pitchFamily="2" charset="-78"/>
+                <a:ea typeface="Amiri" pitchFamily="2" charset="-78"/>
                 <a:cs typeface="Amiri" pitchFamily="2" charset="-78"/>
               </a:rPr>
               <a:t>كَيْفَ شَكْلُهُ؟</a:t>
@@ -9910,6 +9990,7 @@
                   <a:srgbClr val="1B3B6F"/>
                 </a:solidFill>
                 <a:latin typeface="Amiri" pitchFamily="2" charset="-78"/>
+                <a:ea typeface="Amiri" pitchFamily="2" charset="-78"/>
                 <a:cs typeface="Amiri" pitchFamily="2" charset="-78"/>
               </a:rPr>
               <a:t>يَلْبَسُ قَمِيصًا أَحْمَرَ وَبِنْطَالًا أَزْرَقَ.</a:t>
@@ -9986,6 +10067,7 @@
                   <a:srgbClr val="1B3B6F"/>
                 </a:solidFill>
                 <a:latin typeface="Amiri" pitchFamily="2" charset="-78"/>
+                <a:ea typeface="Amiri" pitchFamily="2" charset="-78"/>
                 <a:cs typeface="Amiri" pitchFamily="2" charset="-78"/>
               </a:rPr>
               <a:t>مَاذَا يَلْبَسُ؟</a:t>
@@ -10089,6 +10171,7 @@
                   <a:srgbClr val="1B3B6F"/>
                 </a:solidFill>
                 <a:latin typeface="Amiri" pitchFamily="2" charset="-78"/>
+                <a:ea typeface="Amiri" pitchFamily="2" charset="-78"/>
                 <a:cs typeface="Amiri" pitchFamily="2" charset="-78"/>
               </a:rPr>
               <a:t>لَا، لَيْسَ خَجُولًا، هُوَ اجْتِمَاعِيٌّ وَيَتَكَلَّمُ مَعَ الجَمِيعِ.</a:t>
@@ -10165,6 +10248,7 @@
                   <a:srgbClr val="1B3B6F"/>
                 </a:solidFill>
                 <a:latin typeface="Amiri" pitchFamily="2" charset="-78"/>
+                <a:ea typeface="Amiri" pitchFamily="2" charset="-78"/>
                 <a:cs typeface="Amiri" pitchFamily="2" charset="-78"/>
               </a:rPr>
               <a:t>هَلْ هُوَ خَجُولٌ؟</a:t>
@@ -10374,6 +10458,7 @@
                   <a:srgbClr val="D4AF37"/>
                 </a:solidFill>
                 <a:latin typeface="Amiri" pitchFamily="2" charset="-78"/>
+                <a:ea typeface="Amiri" pitchFamily="2" charset="-78"/>
                 <a:cs typeface="Amiri" pitchFamily="2" charset="-78"/>
               </a:rPr>
               <a:t>م</a:t>
@@ -10694,6 +10779,7 @@
                   <a:srgbClr val="8A6D1E"/>
                 </a:solidFill>
                 <a:latin typeface="Amiri" pitchFamily="2" charset="-78"/>
+                <a:ea typeface="Amiri" pitchFamily="2" charset="-78"/>
                 <a:cs typeface="Amiri" pitchFamily="2" charset="-78"/>
               </a:rPr>
               <a:t>نَمُوذَجُ الإِجَابَةِ</a:t>
@@ -10936,6 +11022,7 @@
                   <a:srgbClr val="1B3B6F"/>
                 </a:solidFill>
                 <a:latin typeface="Amiri" pitchFamily="2" charset="-78"/>
+                <a:ea typeface="Amiri" pitchFamily="2" charset="-78"/>
                 <a:cs typeface="Amiri" pitchFamily="2" charset="-78"/>
               </a:rPr>
               <a:t>اسْمُهَا الأُسْتَاذَةُ هِنْدٌ، وَهِيَ تُدَرِّسُ العُلُومَ.</a:t>
@@ -11012,6 +11099,7 @@
                   <a:srgbClr val="1B3B6F"/>
                 </a:solidFill>
                 <a:latin typeface="Amiri" pitchFamily="2" charset="-78"/>
+                <a:ea typeface="Amiri" pitchFamily="2" charset="-78"/>
                 <a:cs typeface="Amiri" pitchFamily="2" charset="-78"/>
               </a:rPr>
               <a:t>مَنْ مُعَلِّمَتُكُمُ الجَدِيدَةُ؟</a:t>
@@ -11115,6 +11203,7 @@
                   <a:srgbClr val="1B3B6F"/>
                 </a:solidFill>
                 <a:latin typeface="Amiri" pitchFamily="2" charset="-78"/>
+                <a:ea typeface="Amiri" pitchFamily="2" charset="-78"/>
                 <a:cs typeface="Amiri" pitchFamily="2" charset="-78"/>
               </a:rPr>
               <a:t>هِيَ طَوِيلَةٌ، وَتَلْبَسُ نَظَّارَةً، وَعَيْنَاهَا خَضْرَاوَانِ.</a:t>
@@ -11191,6 +11280,7 @@
                   <a:srgbClr val="1B3B6F"/>
                 </a:solidFill>
                 <a:latin typeface="Amiri" pitchFamily="2" charset="-78"/>
+                <a:ea typeface="Amiri" pitchFamily="2" charset="-78"/>
                 <a:cs typeface="Amiri" pitchFamily="2" charset="-78"/>
               </a:rPr>
               <a:t>كَيْفَ شَكْلُهَا؟</a:t>
@@ -11294,6 +11384,7 @@
                   <a:srgbClr val="1B3B6F"/>
                 </a:solidFill>
                 <a:latin typeface="Amiri" pitchFamily="2" charset="-78"/>
+                <a:ea typeface="Amiri" pitchFamily="2" charset="-78"/>
                 <a:cs typeface="Amiri" pitchFamily="2" charset="-78"/>
               </a:rPr>
               <a:t>لَا، لَيْسَتْ صَارِمَةً، بَلْ هِيَ صَبُورَةٌ وَمَرِحَةٌ.</a:t>
@@ -11370,6 +11461,7 @@
                   <a:srgbClr val="1B3B6F"/>
                 </a:solidFill>
                 <a:latin typeface="Amiri" pitchFamily="2" charset="-78"/>
+                <a:ea typeface="Amiri" pitchFamily="2" charset="-78"/>
                 <a:cs typeface="Amiri" pitchFamily="2" charset="-78"/>
               </a:rPr>
               <a:t>وَهَلْ هِيَ صَارِمَةٌ؟</a:t>
@@ -11473,6 +11565,7 @@
                   <a:srgbClr val="1B3B6F"/>
                 </a:solidFill>
                 <a:latin typeface="Amiri" pitchFamily="2" charset="-78"/>
+                <a:ea typeface="Amiri" pitchFamily="2" charset="-78"/>
                 <a:cs typeface="Amiri" pitchFamily="2" charset="-78"/>
               </a:rPr>
               <a:t>وَأَنْتِ يَا أُمِّي، مَنْ كَانَ مُعَلِّمَكِ المُفَضَّلَ فِي المَدْرَسَةِ؟</a:t>
@@ -11549,6 +11642,7 @@
                   <a:srgbClr val="1B3B6F"/>
                 </a:solidFill>
                 <a:latin typeface="Amiri" pitchFamily="2" charset="-78"/>
+                <a:ea typeface="Amiri" pitchFamily="2" charset="-78"/>
                 <a:cs typeface="Amiri" pitchFamily="2" charset="-78"/>
               </a:rPr>
               <a:t>… مُعَلِّمُكَ القَدِيمُ كَانَ صَارِمًا جِدًّا!</a:t>
@@ -11652,6 +11746,7 @@
                   <a:srgbClr val="1B3B6F"/>
                 </a:solidFill>
                 <a:latin typeface="Amiri" pitchFamily="2" charset="-78"/>
+                <a:ea typeface="Amiri" pitchFamily="2" charset="-78"/>
                 <a:cs typeface="Amiri" pitchFamily="2" charset="-78"/>
               </a:rPr>
               <a:t>لِأَنَّهَا تَشْرَحُ بِوُضُوحٍ؛ مَثَلًا أَمْسِ أَجْرَيْنَا تَجْرِبَةً مُمْتِعَةً فِي المُخْتَبَرِ.</a:t>
@@ -11728,6 +11823,7 @@
                   <a:srgbClr val="1B3B6F"/>
                 </a:solidFill>
                 <a:latin typeface="Amiri" pitchFamily="2" charset="-78"/>
+                <a:ea typeface="Amiri" pitchFamily="2" charset="-78"/>
                 <a:cs typeface="Amiri" pitchFamily="2" charset="-78"/>
               </a:rPr>
               <a:t>لِمَاذَا تُحِبُّهَا؟</a:t>
@@ -11937,6 +12033,7 @@
                   <a:srgbClr val="D4AF37"/>
                 </a:solidFill>
                 <a:latin typeface="Amiri" pitchFamily="2" charset="-78"/>
+                <a:ea typeface="Amiri" pitchFamily="2" charset="-78"/>
                 <a:cs typeface="Amiri" pitchFamily="2" charset="-78"/>
               </a:rPr>
               <a:t>م</a:t>
@@ -12257,6 +12354,7 @@
                   <a:srgbClr val="8A6D1E"/>
                 </a:solidFill>
                 <a:latin typeface="Amiri" pitchFamily="2" charset="-78"/>
+                <a:ea typeface="Amiri" pitchFamily="2" charset="-78"/>
                 <a:cs typeface="Amiri" pitchFamily="2" charset="-78"/>
               </a:rPr>
               <a:t>نَمُوذَجُ الإِجَابَةِ</a:t>
@@ -12499,6 +12597,7 @@
                   <a:srgbClr val="1B3B6F"/>
                 </a:solidFill>
                 <a:latin typeface="Amiri" pitchFamily="2" charset="-78"/>
+                <a:ea typeface="Amiri" pitchFamily="2" charset="-78"/>
                 <a:cs typeface="Amiri" pitchFamily="2" charset="-78"/>
               </a:rPr>
               <a:t>أَقْتَرِحُ سَلْمَى، الَّتِي تَلْعَبُ مَعَنَا مُنْذُ ثَلَاثِ سَنَوَاتٍ.</a:t>
@@ -12575,6 +12674,7 @@
                   <a:srgbClr val="1B3B6F"/>
                 </a:solidFill>
                 <a:latin typeface="Amiri" pitchFamily="2" charset="-78"/>
+                <a:ea typeface="Amiri" pitchFamily="2" charset="-78"/>
                 <a:cs typeface="Amiri" pitchFamily="2" charset="-78"/>
               </a:rPr>
               <a:t>مَنْ تَقْتَرِحُ قَائِدًا لِلْفَرِيقِ؟</a:t>
@@ -12678,6 +12778,7 @@
                   <a:srgbClr val="1B3B6F"/>
                 </a:solidFill>
                 <a:latin typeface="Amiri" pitchFamily="2" charset="-78"/>
+                <a:ea typeface="Amiri" pitchFamily="2" charset="-78"/>
                 <a:cs typeface="Amiri" pitchFamily="2" charset="-78"/>
               </a:rPr>
               <a:t>لِأَنَّهَا شُجَاعَةٌ وَعَادِلَةٌ، وَتُشَجِّعُ الجَمِيعَ حَتَّى عِنْدَمَا نَخْسَرُ.</a:t>
@@ -12754,6 +12855,7 @@
                   <a:srgbClr val="1B3B6F"/>
                 </a:solidFill>
                 <a:latin typeface="Amiri" pitchFamily="2" charset="-78"/>
+                <a:ea typeface="Amiri" pitchFamily="2" charset="-78"/>
                 <a:cs typeface="Amiri" pitchFamily="2" charset="-78"/>
               </a:rPr>
               <a:t>لِمَاذَا هِيَ؟</a:t>
@@ -12857,6 +12959,7 @@
                   <a:srgbClr val="1B3B6F"/>
                 </a:solidFill>
                 <a:latin typeface="Amiri" pitchFamily="2" charset="-78"/>
+                <a:ea typeface="Amiri" pitchFamily="2" charset="-78"/>
                 <a:cs typeface="Amiri" pitchFamily="2" charset="-78"/>
               </a:rPr>
               <a:t>فِي المُبَارَاةِ المَاضِيَةِ، عِنْدَمَا وَقَعَتْ زَمِيلَتُنَا، تَوَقَّفَتْ سَلْمَى وَسَاعَدَتْهَا.</a:t>
@@ -12933,6 +13036,7 @@
                   <a:srgbClr val="1B3B6F"/>
                 </a:solidFill>
                 <a:latin typeface="Amiri" pitchFamily="2" charset="-78"/>
+                <a:ea typeface="Amiri" pitchFamily="2" charset="-78"/>
                 <a:cs typeface="Amiri" pitchFamily="2" charset="-78"/>
               </a:rPr>
               <a:t>أَعْطِنِي مِثَالًا.</a:t>
@@ -13036,6 +13140,7 @@
                   <a:srgbClr val="1B3B6F"/>
                 </a:solidFill>
                 <a:latin typeface="Amiri" pitchFamily="2" charset="-78"/>
+                <a:ea typeface="Amiri" pitchFamily="2" charset="-78"/>
                 <a:cs typeface="Amiri" pitchFamily="2" charset="-78"/>
               </a:rPr>
               <a:t>صَحِيحٌ، لٰكِنَّ القَائِدَ لَيْسَ بِالضَّرُورَةِ أَمْهَرَ لَاعِبٍ، بَلِ الشَّخْصُ الَّذِي يَحْتَرِمُهُ الجَمِيعُ.</a:t>
@@ -13112,6 +13217,7 @@
                   <a:srgbClr val="1B3B6F"/>
                 </a:solidFill>
                 <a:latin typeface="Amiri" pitchFamily="2" charset="-78"/>
+                <a:ea typeface="Amiri" pitchFamily="2" charset="-78"/>
                 <a:cs typeface="Amiri" pitchFamily="2" charset="-78"/>
               </a:rPr>
               <a:t>لٰكِنَّهَا لَيْسَتْ أَفْضَلَ لَاعِبَةٍ.</a:t>
@@ -13215,6 +13321,7 @@
                   <a:srgbClr val="1B3B6F"/>
                 </a:solidFill>
                 <a:latin typeface="Amiri" pitchFamily="2" charset="-78"/>
+                <a:ea typeface="Amiri" pitchFamily="2" charset="-78"/>
                 <a:cs typeface="Amiri" pitchFamily="2" charset="-78"/>
               </a:rPr>
               <a:t>رُبَّمَا، لِأَنِّي مُنَظَّمٌ، لٰكِنِّي خَجُولٌ قَلِيلًا وَلَا أُحِبُّ أَنْ أَتَكَلَّمَ أَمَامَ النَّاسِ.</a:t>
@@ -13291,6 +13398,7 @@
                   <a:srgbClr val="1B3B6F"/>
                 </a:solidFill>
                 <a:latin typeface="Amiri" pitchFamily="2" charset="-78"/>
+                <a:ea typeface="Amiri" pitchFamily="2" charset="-78"/>
                 <a:cs typeface="Amiri" pitchFamily="2" charset="-78"/>
               </a:rPr>
               <a:t>وَأَنْتَ، هَلْ تَصْلُحُ قَائِدًا؟</a:t>
@@ -13500,6 +13608,7 @@
                   <a:srgbClr val="D4AF37"/>
                 </a:solidFill>
                 <a:latin typeface="Amiri" pitchFamily="2" charset="-78"/>
+                <a:ea typeface="Amiri" pitchFamily="2" charset="-78"/>
                 <a:cs typeface="Amiri" pitchFamily="2" charset="-78"/>
               </a:rPr>
               <a:t>م</a:t>
@@ -13820,6 +13929,7 @@
                   <a:srgbClr val="8A6D1E"/>
                 </a:solidFill>
                 <a:latin typeface="Amiri" pitchFamily="2" charset="-78"/>
+                <a:ea typeface="Amiri" pitchFamily="2" charset="-78"/>
                 <a:cs typeface="Amiri" pitchFamily="2" charset="-78"/>
               </a:rPr>
               <a:t>نَمُوذَجُ الإِجَابَةِ</a:t>
@@ -14062,6 +14172,7 @@
                   <a:srgbClr val="1B3B6F"/>
                 </a:solidFill>
                 <a:latin typeface="Amiri" pitchFamily="2" charset="-78"/>
+                <a:ea typeface="Amiri" pitchFamily="2" charset="-78"/>
                 <a:cs typeface="Amiri" pitchFamily="2" charset="-78"/>
               </a:rPr>
               <a:t>لِلْأَسَفِ نَعَمْ، لِأَنَّ المَظْهَرَ هُوَ أَوَّلُ شَيْءٍ نَرَاهُ، قَبْلَ أَنْ نَعْرِفَ الشَّخْصِيَّةَ.</a:t>
@@ -14138,6 +14249,7 @@
                   <a:srgbClr val="1B3B6F"/>
                 </a:solidFill>
                 <a:latin typeface="Amiri" pitchFamily="2" charset="-78"/>
+                <a:ea typeface="Amiri" pitchFamily="2" charset="-78"/>
                 <a:cs typeface="Amiri" pitchFamily="2" charset="-78"/>
               </a:rPr>
               <a:t>هَلْ نَحْكُمُ عَلَى النَّاسِ مِنْ مَظْهَرِهِمْ؟</a:t>
@@ -14241,6 +14353,7 @@
                   <a:srgbClr val="1B3B6F"/>
                 </a:solidFill>
                 <a:latin typeface="Amiri" pitchFamily="2" charset="-78"/>
+                <a:ea typeface="Amiri" pitchFamily="2" charset="-78"/>
                 <a:cs typeface="Amiri" pitchFamily="2" charset="-78"/>
               </a:rPr>
               <a:t>نَعَمْ، ظَنَنْتُ أَنَّ جَارَنَا الجَدِيدَ مُتَكَبِّرٌ لِأَنَّهُ لَا يَبْتَسِمُ، لٰكِنَّهُ كَانَ خَجُولًا فَقَطْ، وَهُوَ الآنَ صَدِيقُ أَبِي.</a:t>
@@ -14317,6 +14430,7 @@
                   <a:srgbClr val="1B3B6F"/>
                 </a:solidFill>
                 <a:latin typeface="Amiri" pitchFamily="2" charset="-78"/>
+                <a:ea typeface="Amiri" pitchFamily="2" charset="-78"/>
                 <a:cs typeface="Amiri" pitchFamily="2" charset="-78"/>
               </a:rPr>
               <a:t>هَلْ حَكَمْتَ عَلَى شَخْصٍ خَطَأً مَرَّةً؟</a:t>
@@ -14420,6 +14534,7 @@
                   <a:srgbClr val="1B3B6F"/>
                 </a:solidFill>
                 <a:latin typeface="Amiri" pitchFamily="2" charset="-78"/>
+                <a:ea typeface="Amiri" pitchFamily="2" charset="-78"/>
                 <a:cs typeface="Amiri" pitchFamily="2" charset="-78"/>
               </a:rPr>
               <a:t>تَجْعَلُ كَثِيرًا مِنَ الشَّبَابِ يَظُنُّونَ أَنَّ الجَمَالَ شَكْلٌ وَاحِدٌ، لِأَنَّ الصُّوَرَ مُعَدَّلَةٌ بِالفَلَاتِرِ.</a:t>
@@ -14496,6 +14611,7 @@
                   <a:srgbClr val="1B3B6F"/>
                 </a:solidFill>
                 <a:latin typeface="Amiri" pitchFamily="2" charset="-78"/>
+                <a:ea typeface="Amiri" pitchFamily="2" charset="-78"/>
                 <a:cs typeface="Amiri" pitchFamily="2" charset="-78"/>
               </a:rPr>
               <a:t>مَا تَأْثِيرُ وَسَائِلِ التَّوَاصُلِ عَلَى نَظْرَتِنَا إِلَى الجَمَالِ؟</a:t>
@@ -14599,6 +14715,7 @@
                   <a:srgbClr val="1B3B6F"/>
                 </a:solidFill>
                 <a:latin typeface="Amiri" pitchFamily="2" charset="-78"/>
+                <a:ea typeface="Amiri" pitchFamily="2" charset="-78"/>
                 <a:cs typeface="Amiri" pitchFamily="2" charset="-78"/>
               </a:rPr>
               <a:t>صَحِيحٌ أَنَّ الاهْتِمَامَ بِالمَظْهَرِ طَبِيعِيٌّ، غَيْرَ أَنَّ الأَخْلَاقَ هِيَ الَّتِي تَجْعَلُ النَّاسَ يُحِبُّونَنَا حَقًّا.</a:t>
@@ -14675,6 +14792,7 @@
                   <a:srgbClr val="1B3B6F"/>
                 </a:solidFill>
                 <a:latin typeface="Amiri" pitchFamily="2" charset="-78"/>
+                <a:ea typeface="Amiri" pitchFamily="2" charset="-78"/>
                 <a:cs typeface="Amiri" pitchFamily="2" charset="-78"/>
               </a:rPr>
               <a:t>أَلَيْسَ مِنَ الطَّبِيعِيِّ أَنْ نَهْتَمَّ بِمَظْهَرِنَا؟</a:t>
@@ -14778,6 +14896,7 @@
                   <a:srgbClr val="1B3B6F"/>
                 </a:solidFill>
                 <a:latin typeface="Amiri" pitchFamily="2" charset="-78"/>
+                <a:ea typeface="Amiri" pitchFamily="2" charset="-78"/>
                 <a:cs typeface="Amiri" pitchFamily="2" charset="-78"/>
               </a:rPr>
               <a:t>لَوِ اسْتَطَعْتُ، لَأَصْبَحْتُ أَكْثَرَ صَبْرًا، لِأَنِّي أَغْضَبُ بِسُرْعَةٍ عِنْدَمَا أَخْسَرُ فِي الأَلْعَابِ.</a:t>
@@ -14854,6 +14973,7 @@
                   <a:srgbClr val="1B3B6F"/>
                 </a:solidFill>
                 <a:latin typeface="Amiri" pitchFamily="2" charset="-78"/>
+                <a:ea typeface="Amiri" pitchFamily="2" charset="-78"/>
                 <a:cs typeface="Amiri" pitchFamily="2" charset="-78"/>
               </a:rPr>
               <a:t>لَوِ اسْتَطَعْتَ أَنْ تُغَيِّرَ صِفَةً فِي شَخْصِيَّتِكَ، فَمَا هِيَ؟</a:t>
@@ -15063,6 +15183,7 @@
                   <a:srgbClr val="D4AF37"/>
                 </a:solidFill>
                 <a:latin typeface="Amiri" pitchFamily="2" charset="-78"/>
+                <a:ea typeface="Amiri" pitchFamily="2" charset="-78"/>
                 <a:cs typeface="Amiri" pitchFamily="2" charset="-78"/>
               </a:rPr>
               <a:t>م</a:t>
@@ -15383,6 +15504,7 @@
                   <a:srgbClr val="8A6D1E"/>
                 </a:solidFill>
                 <a:latin typeface="Amiri" pitchFamily="2" charset="-78"/>
+                <a:ea typeface="Amiri" pitchFamily="2" charset="-78"/>
                 <a:cs typeface="Amiri" pitchFamily="2" charset="-78"/>
               </a:rPr>
               <a:t>شَكْلِي وَشَخْصِيَّتِي</a:t>
@@ -15663,6 +15785,7 @@
                   <a:srgbClr val="1B3B6F"/>
                 </a:solidFill>
                 <a:latin typeface="Amiri" pitchFamily="2" charset="-78"/>
+                <a:ea typeface="Amiri" pitchFamily="2" charset="-78"/>
                 <a:cs typeface="Amiri" pitchFamily="2" charset="-78"/>
               </a:rPr>
               <a:t>أَنَا … وَشَعْرِي …</a:t>
@@ -15739,6 +15862,7 @@
                   <a:srgbClr val="1B3B6F"/>
                 </a:solidFill>
                 <a:latin typeface="Amiri" pitchFamily="2" charset="-78"/>
+                <a:ea typeface="Amiri" pitchFamily="2" charset="-78"/>
                 <a:cs typeface="Amiri" pitchFamily="2" charset="-78"/>
               </a:rPr>
               <a:t>صِفْ شَكْلَكَ.</a:t>
@@ -15907,6 +16031,7 @@
                   <a:srgbClr val="1B3B6F"/>
                 </a:solidFill>
                 <a:latin typeface="Amiri" pitchFamily="2" charset="-78"/>
+                <a:ea typeface="Amiri" pitchFamily="2" charset="-78"/>
                 <a:cs typeface="Amiri" pitchFamily="2" charset="-78"/>
               </a:rPr>
               <a:t>أَنَا … وَ…</a:t>
@@ -15983,6 +16108,7 @@
                   <a:srgbClr val="1B3B6F"/>
                 </a:solidFill>
                 <a:latin typeface="Amiri" pitchFamily="2" charset="-78"/>
+                <a:ea typeface="Amiri" pitchFamily="2" charset="-78"/>
                 <a:cs typeface="Amiri" pitchFamily="2" charset="-78"/>
               </a:rPr>
               <a:t>صِفْ شَخْصِيَّتَكَ.</a:t>
@@ -16151,6 +16277,7 @@
                   <a:srgbClr val="1B3B6F"/>
                 </a:solidFill>
                 <a:latin typeface="Amiri" pitchFamily="2" charset="-78"/>
+                <a:ea typeface="Amiri" pitchFamily="2" charset="-78"/>
                 <a:cs typeface="Amiri" pitchFamily="2" charset="-78"/>
               </a:rPr>
               <a:t>لَا، لَسْتُ … / نَعَمْ، …</a:t>
@@ -16227,6 +16354,7 @@
                   <a:srgbClr val="1B3B6F"/>
                 </a:solidFill>
                 <a:latin typeface="Amiri" pitchFamily="2" charset="-78"/>
+                <a:ea typeface="Amiri" pitchFamily="2" charset="-78"/>
                 <a:cs typeface="Amiri" pitchFamily="2" charset="-78"/>
               </a:rPr>
               <a:t>هَلْ أَنْتَ خَجُولٌ؟</a:t>
@@ -16395,6 +16523,7 @@
                   <a:srgbClr val="1B3B6F"/>
                 </a:solidFill>
                 <a:latin typeface="Amiri" pitchFamily="2" charset="-78"/>
+                <a:ea typeface="Amiri" pitchFamily="2" charset="-78"/>
                 <a:cs typeface="Amiri" pitchFamily="2" charset="-78"/>
               </a:rPr>
               <a:t>أُمِّي / أَبِي … هِيَ / هُوَ …</a:t>
@@ -16471,6 +16600,7 @@
                   <a:srgbClr val="1B3B6F"/>
                 </a:solidFill>
                 <a:latin typeface="Amiri" pitchFamily="2" charset="-78"/>
+                <a:ea typeface="Amiri" pitchFamily="2" charset="-78"/>
                 <a:cs typeface="Amiri" pitchFamily="2" charset="-78"/>
               </a:rPr>
               <a:t>صِفْ أَحَدَ أَفْرَادِ أُسْرَتِكَ.</a:t>
@@ -16639,6 +16769,7 @@
                   <a:srgbClr val="1B3B6F"/>
                 </a:solidFill>
                 <a:latin typeface="Amiri" pitchFamily="2" charset="-78"/>
+                <a:ea typeface="Amiri" pitchFamily="2" charset="-78"/>
                 <a:cs typeface="Amiri" pitchFamily="2" charset="-78"/>
               </a:rPr>
               <a:t>أُعْجَبُ بِجَدِّي / بِأُمِّي … لِأَنَّ …</a:t>
@@ -16715,6 +16846,7 @@
                   <a:srgbClr val="1B3B6F"/>
                 </a:solidFill>
                 <a:latin typeface="Amiri" pitchFamily="2" charset="-78"/>
+                <a:ea typeface="Amiri" pitchFamily="2" charset="-78"/>
                 <a:cs typeface="Amiri" pitchFamily="2" charset="-78"/>
               </a:rPr>
               <a:t>مَنِ الشَّخْصُ الَّذِي تُعْجَبُ بِهِ؟</a:t>
@@ -16869,6 +17001,7 @@
                   <a:srgbClr val="1B3B6F"/>
                 </a:solidFill>
                 <a:latin typeface="Amiri" pitchFamily="2" charset="-78"/>
+                <a:ea typeface="Amiri" pitchFamily="2" charset="-78"/>
                 <a:cs typeface="Amiri" pitchFamily="2" charset="-78"/>
               </a:rPr>
               <a:t>عَفْوًا، هَلْ يُمْكِنُ أَنْ تُعِيدَ السُّؤَالَ؟</a:t>
@@ -17002,6 +17135,7 @@
                   <a:srgbClr val="D4AF37"/>
                 </a:solidFill>
                 <a:latin typeface="Amiri" pitchFamily="2" charset="-78"/>
+                <a:ea typeface="Amiri" pitchFamily="2" charset="-78"/>
                 <a:cs typeface="Amiri" pitchFamily="2" charset="-78"/>
               </a:rPr>
               <a:t>م</a:t>
@@ -17322,6 +17456,7 @@
                   <a:srgbClr val="8A6D1E"/>
                 </a:solidFill>
                 <a:latin typeface="Amiri" pitchFamily="2" charset="-78"/>
+                <a:ea typeface="Amiri" pitchFamily="2" charset="-78"/>
                 <a:cs typeface="Amiri" pitchFamily="2" charset="-78"/>
               </a:rPr>
               <a:t>النَّاسُ مِنْ حَوْلِي</a:t>
@@ -17602,6 +17737,7 @@
                   <a:srgbClr val="1B3B6F"/>
                 </a:solidFill>
                 <a:latin typeface="Amiri" pitchFamily="2" charset="-78"/>
+                <a:ea typeface="Amiri" pitchFamily="2" charset="-78"/>
                 <a:cs typeface="Amiri" pitchFamily="2" charset="-78"/>
               </a:rPr>
               <a:t>صَدِيقِي … شَعْرُهُ … وَهُوَ …</a:t>
@@ -17678,6 +17814,7 @@
                   <a:srgbClr val="1B3B6F"/>
                 </a:solidFill>
                 <a:latin typeface="Amiri" pitchFamily="2" charset="-78"/>
+                <a:ea typeface="Amiri" pitchFamily="2" charset="-78"/>
                 <a:cs typeface="Amiri" pitchFamily="2" charset="-78"/>
               </a:rPr>
               <a:t>صِفْ صَدِيقَكَ المُفَضَّلَ: شَكْلَهُ وَشَخْصِيَّتَهُ.</a:t>
@@ -17781,6 +17918,7 @@
                   <a:srgbClr val="1B3B6F"/>
                 </a:solidFill>
                 <a:latin typeface="Amiri" pitchFamily="2" charset="-78"/>
+                <a:ea typeface="Amiri" pitchFamily="2" charset="-78"/>
                 <a:cs typeface="Amiri" pitchFamily="2" charset="-78"/>
               </a:rPr>
               <a:t>لَا أُحِبُّ … لِأَنَّ …</a:t>
@@ -17857,6 +17995,7 @@
                   <a:srgbClr val="1B3B6F"/>
                 </a:solidFill>
                 <a:latin typeface="Amiri" pitchFamily="2" charset="-78"/>
+                <a:ea typeface="Amiri" pitchFamily="2" charset="-78"/>
                 <a:cs typeface="Amiri" pitchFamily="2" charset="-78"/>
               </a:rPr>
               <a:t>مَا الصِّفَةُ الَّتِي لَا تُحِبُّهَا فِي النَّاسِ؟</a:t>
@@ -17960,6 +18099,7 @@
                   <a:srgbClr val="1B3B6F"/>
                 </a:solidFill>
                 <a:latin typeface="Amiri" pitchFamily="2" charset="-78"/>
+                <a:ea typeface="Amiri" pitchFamily="2" charset="-78"/>
                 <a:cs typeface="Amiri" pitchFamily="2" charset="-78"/>
               </a:rPr>
               <a:t>كَانَ شَعْرِي … أَمَّا الآنَ فَهُوَ …</a:t>
@@ -18036,6 +18176,7 @@
                   <a:srgbClr val="1B3B6F"/>
                 </a:solidFill>
                 <a:latin typeface="Amiri" pitchFamily="2" charset="-78"/>
+                <a:ea typeface="Amiri" pitchFamily="2" charset="-78"/>
                 <a:cs typeface="Amiri" pitchFamily="2" charset="-78"/>
               </a:rPr>
               <a:t>كَيْفَ تَغَيَّرَ شَكْلُكَ مُنْذُ كُنْتَ صَغِيرًا؟</a:t>
@@ -18139,6 +18280,7 @@
                   <a:srgbClr val="1B3B6F"/>
                 </a:solidFill>
                 <a:latin typeface="Amiri" pitchFamily="2" charset="-78"/>
+                <a:ea typeface="Amiri" pitchFamily="2" charset="-78"/>
                 <a:cs typeface="Amiri" pitchFamily="2" charset="-78"/>
               </a:rPr>
               <a:t>أُشْبِهُ … فِي … لٰكِنَّ شَخْصِيَّتِي …</a:t>
@@ -18215,6 +18357,7 @@
                   <a:srgbClr val="1B3B6F"/>
                 </a:solidFill>
                 <a:latin typeface="Amiri" pitchFamily="2" charset="-78"/>
+                <a:ea typeface="Amiri" pitchFamily="2" charset="-78"/>
                 <a:cs typeface="Amiri" pitchFamily="2" charset="-78"/>
               </a:rPr>
               <a:t>هَلْ تُشْبِهُ أَحَدًا فِي أُسْرَتِكَ؟</a:t>
@@ -18318,6 +18461,7 @@
                   <a:srgbClr val="1B3B6F"/>
                 </a:solidFill>
                 <a:latin typeface="Amiri" pitchFamily="2" charset="-78"/>
+                <a:ea typeface="Amiri" pitchFamily="2" charset="-78"/>
                 <a:cs typeface="Amiri" pitchFamily="2" charset="-78"/>
               </a:rPr>
               <a:t>أُرِيدُ أَنْ أَكُونَ أَكْثَرَ … لِكَيْ …</a:t>
@@ -18394,6 +18538,7 @@
                   <a:srgbClr val="1B3B6F"/>
                 </a:solidFill>
                 <a:latin typeface="Amiri" pitchFamily="2" charset="-78"/>
+                <a:ea typeface="Amiri" pitchFamily="2" charset="-78"/>
                 <a:cs typeface="Amiri" pitchFamily="2" charset="-78"/>
               </a:rPr>
               <a:t>أَيَّ صِفَةٍ تُرِيدُ أَنْ تُطَوِّرَهَا فِي المُسْتَقْبَلِ؟</a:t>
@@ -18603,6 +18748,7 @@
                   <a:srgbClr val="D4AF37"/>
                 </a:solidFill>
                 <a:latin typeface="Amiri" pitchFamily="2" charset="-78"/>
+                <a:ea typeface="Amiri" pitchFamily="2" charset="-78"/>
                 <a:cs typeface="Amiri" pitchFamily="2" charset="-78"/>
               </a:rPr>
               <a:t>م</a:t>
@@ -18923,6 +19069,7 @@
                   <a:srgbClr val="8A6D1E"/>
                 </a:solidFill>
                 <a:latin typeface="Amiri" pitchFamily="2" charset="-78"/>
+                <a:ea typeface="Amiri" pitchFamily="2" charset="-78"/>
                 <a:cs typeface="Amiri" pitchFamily="2" charset="-78"/>
               </a:rPr>
               <a:t>الشَّخْصِيَّةُ وَالمُجْتَمَعُ</a:t>
@@ -19203,6 +19350,7 @@
                   <a:srgbClr val="1B3B6F"/>
                 </a:solidFill>
                 <a:latin typeface="Amiri" pitchFamily="2" charset="-78"/>
+                <a:ea typeface="Amiri" pitchFamily="2" charset="-78"/>
                 <a:cs typeface="Amiri" pitchFamily="2" charset="-78"/>
               </a:rPr>
               <a:t>أَعْتَقِدُ أَنَّ … لِأَنَّ …</a:t>
@@ -19279,6 +19427,7 @@
                   <a:srgbClr val="1B3B6F"/>
                 </a:solidFill>
                 <a:latin typeface="Amiri" pitchFamily="2" charset="-78"/>
+                <a:ea typeface="Amiri" pitchFamily="2" charset="-78"/>
                 <a:cs typeface="Amiri" pitchFamily="2" charset="-78"/>
               </a:rPr>
               <a:t>هَلِ الشَّخْصِيَّةُ أَهَمُّ مِنَ المَظْهَرِ؟</a:t>
@@ -19382,6 +19531,7 @@
                   <a:srgbClr val="1B3B6F"/>
                 </a:solidFill>
                 <a:latin typeface="Amiri" pitchFamily="2" charset="-78"/>
+                <a:ea typeface="Amiri" pitchFamily="2" charset="-78"/>
                 <a:cs typeface="Amiri" pitchFamily="2" charset="-78"/>
               </a:rPr>
               <a:t>القَائِدُ النَّاجِحُ هُوَ الَّذِي …</a:t>
@@ -19458,6 +19608,7 @@
                   <a:srgbClr val="1B3B6F"/>
                 </a:solidFill>
                 <a:latin typeface="Amiri" pitchFamily="2" charset="-78"/>
+                <a:ea typeface="Amiri" pitchFamily="2" charset="-78"/>
                 <a:cs typeface="Amiri" pitchFamily="2" charset="-78"/>
               </a:rPr>
               <a:t>مَا صِفَاتُ القَائِدِ النَّاجِحِ؟</a:t>
@@ -19561,6 +19712,7 @@
                   <a:srgbClr val="1B3B6F"/>
                 </a:solidFill>
                 <a:latin typeface="Amiri" pitchFamily="2" charset="-78"/>
+                <a:ea typeface="Amiri" pitchFamily="2" charset="-78"/>
                 <a:cs typeface="Amiri" pitchFamily="2" charset="-78"/>
               </a:rPr>
               <a:t>نَعَمْ، فَأَنَا مَثَلًا كُنْتُ … أَمَّا الآنَ …</a:t>
@@ -19637,6 +19789,7 @@
                   <a:srgbClr val="1B3B6F"/>
                 </a:solidFill>
                 <a:latin typeface="Amiri" pitchFamily="2" charset="-78"/>
+                <a:ea typeface="Amiri" pitchFamily="2" charset="-78"/>
                 <a:cs typeface="Amiri" pitchFamily="2" charset="-78"/>
               </a:rPr>
               <a:t>هَلْ تَتَغَيَّرُ شَخْصِيَّةُ الإِنْسَانِ؟</a:t>
@@ -19740,6 +19893,7 @@
                   <a:srgbClr val="1B3B6F"/>
                 </a:solidFill>
                 <a:latin typeface="Amiri" pitchFamily="2" charset="-78"/>
+                <a:ea typeface="Amiri" pitchFamily="2" charset="-78"/>
                 <a:cs typeface="Amiri" pitchFamily="2" charset="-78"/>
               </a:rPr>
               <a:t>صَحِيحٌ أَنَّ … غَيْرَ أَنَّ …</a:t>
@@ -19816,6 +19970,7 @@
                   <a:srgbClr val="1B3B6F"/>
                 </a:solidFill>
                 <a:latin typeface="Amiri" pitchFamily="2" charset="-78"/>
+                <a:ea typeface="Amiri" pitchFamily="2" charset="-78"/>
                 <a:cs typeface="Amiri" pitchFamily="2" charset="-78"/>
               </a:rPr>
               <a:t>هَلْ تُعْطِي الصُّوَرُ عَلَى الإِنْتَرْنِتِ صُورَةً صَادِقَةً عَنِ النَّاسِ؟</a:t>
@@ -19919,6 +20074,7 @@
                   <a:srgbClr val="1B3B6F"/>
                 </a:solidFill>
                 <a:latin typeface="Amiri" pitchFamily="2" charset="-78"/>
+                <a:ea typeface="Amiri" pitchFamily="2" charset="-78"/>
                 <a:cs typeface="Amiri" pitchFamily="2" charset="-78"/>
               </a:rPr>
               <a:t>لَوْ كُنْتُ …، لَوَصَفَنِي …</a:t>
@@ -19995,6 +20151,7 @@
                   <a:srgbClr val="1B3B6F"/>
                 </a:solidFill>
                 <a:latin typeface="Amiri" pitchFamily="2" charset="-78"/>
+                <a:ea typeface="Amiri" pitchFamily="2" charset="-78"/>
                 <a:cs typeface="Amiri" pitchFamily="2" charset="-78"/>
               </a:rPr>
               <a:t>لَوْ كُنْتَ شَخْصِيَّةً فِي رِوَايَةٍ، كَيْفَ يَصِفُكَ الكَاتِبُ؟</a:t>
@@ -20204,6 +20361,7 @@
                   <a:srgbClr val="D4AF37"/>
                 </a:solidFill>
                 <a:latin typeface="Amiri" pitchFamily="2" charset="-78"/>
+                <a:ea typeface="Amiri" pitchFamily="2" charset="-78"/>
                 <a:cs typeface="Amiri" pitchFamily="2" charset="-78"/>
               </a:rPr>
               <a:t>م</a:t>
@@ -20524,6 +20682,7 @@
                   <a:srgbClr val="8A6D1E"/>
                 </a:solidFill>
                 <a:latin typeface="Amiri" pitchFamily="2" charset="-78"/>
+                <a:ea typeface="Amiri" pitchFamily="2" charset="-78"/>
                 <a:cs typeface="Amiri" pitchFamily="2" charset="-78"/>
               </a:rPr>
               <a:t>آدَابُ الصَّفِّ</a:t>
@@ -22055,6 +22214,7 @@
                   <a:srgbClr val="D4AF37"/>
                 </a:solidFill>
                 <a:latin typeface="Amiri" pitchFamily="2" charset="-78"/>
+                <a:ea typeface="Amiri" pitchFamily="2" charset="-78"/>
                 <a:cs typeface="Amiri" pitchFamily="2" charset="-78"/>
               </a:rPr>
               <a:t>م</a:t>
@@ -22375,6 +22535,7 @@
                   <a:srgbClr val="8A6D1E"/>
                 </a:solidFill>
                 <a:latin typeface="Amiri" pitchFamily="2" charset="-78"/>
+                <a:ea typeface="Amiri" pitchFamily="2" charset="-78"/>
                 <a:cs typeface="Amiri" pitchFamily="2" charset="-78"/>
               </a:rPr>
               <a:t>نَمُوذَجُ الإِجَابَةِ</a:t>
@@ -22617,6 +22778,7 @@
                   <a:srgbClr val="1B3B6F"/>
                 </a:solidFill>
                 <a:latin typeface="Amiri" pitchFamily="2" charset="-78"/>
+                <a:ea typeface="Amiri" pitchFamily="2" charset="-78"/>
                 <a:cs typeface="Amiri" pitchFamily="2" charset="-78"/>
               </a:rPr>
               <a:t>أَنَا طَوِيلٌ، وَشَعْرِي أَسْوَدُ، وَعَيْنَايَ بُنِّيَّتَانِ.</a:t>
@@ -22693,6 +22855,7 @@
                   <a:srgbClr val="1B3B6F"/>
                 </a:solidFill>
                 <a:latin typeface="Amiri" pitchFamily="2" charset="-78"/>
+                <a:ea typeface="Amiri" pitchFamily="2" charset="-78"/>
                 <a:cs typeface="Amiri" pitchFamily="2" charset="-78"/>
               </a:rPr>
               <a:t>صِفْ شَكْلَكَ.</a:t>
@@ -22796,6 +22959,7 @@
                   <a:srgbClr val="1B3B6F"/>
                 </a:solidFill>
                 <a:latin typeface="Amiri" pitchFamily="2" charset="-78"/>
+                <a:ea typeface="Amiri" pitchFamily="2" charset="-78"/>
                 <a:cs typeface="Amiri" pitchFamily="2" charset="-78"/>
               </a:rPr>
               <a:t>أَنَا هَادِئٌ وَمُجْتَهِدٌ، وَأُحِبُّ أَنْ أُسَاعِدَ النَّاسَ.</a:t>
@@ -22872,6 +23036,7 @@
                   <a:srgbClr val="1B3B6F"/>
                 </a:solidFill>
                 <a:latin typeface="Amiri" pitchFamily="2" charset="-78"/>
+                <a:ea typeface="Amiri" pitchFamily="2" charset="-78"/>
                 <a:cs typeface="Amiri" pitchFamily="2" charset="-78"/>
               </a:rPr>
               <a:t>صِفْ شَخْصِيَّتَكَ.</a:t>
@@ -22975,6 +23140,7 @@
                   <a:srgbClr val="1B3B6F"/>
                 </a:solidFill>
                 <a:latin typeface="Amiri" pitchFamily="2" charset="-78"/>
+                <a:ea typeface="Amiri" pitchFamily="2" charset="-78"/>
                 <a:cs typeface="Amiri" pitchFamily="2" charset="-78"/>
               </a:rPr>
               <a:t>لَا، لَسْتُ خَجُولًا، أَنَا اجْتِمَاعِيٌّ جِدًّا.</a:t>
@@ -23051,6 +23217,7 @@
                   <a:srgbClr val="1B3B6F"/>
                 </a:solidFill>
                 <a:latin typeface="Amiri" pitchFamily="2" charset="-78"/>
+                <a:ea typeface="Amiri" pitchFamily="2" charset="-78"/>
                 <a:cs typeface="Amiri" pitchFamily="2" charset="-78"/>
               </a:rPr>
               <a:t>هَلْ أَنْتَ خَجُولٌ؟</a:t>
@@ -23154,6 +23321,7 @@
                   <a:srgbClr val="1B3B6F"/>
                 </a:solidFill>
                 <a:latin typeface="Amiri" pitchFamily="2" charset="-78"/>
+                <a:ea typeface="Amiri" pitchFamily="2" charset="-78"/>
                 <a:cs typeface="Amiri" pitchFamily="2" charset="-78"/>
               </a:rPr>
               <a:t>أُمِّي قَصِيرَةٌ وَجَمِيلَةٌ، وَهِيَ كَرِيمَةٌ وَصَبُورَةٌ.</a:t>
@@ -23230,6 +23398,7 @@
                   <a:srgbClr val="1B3B6F"/>
                 </a:solidFill>
                 <a:latin typeface="Amiri" pitchFamily="2" charset="-78"/>
+                <a:ea typeface="Amiri" pitchFamily="2" charset="-78"/>
                 <a:cs typeface="Amiri" pitchFamily="2" charset="-78"/>
               </a:rPr>
               <a:t>صِفْ أَحَدَ أَفْرَادِ أُسْرَتِكَ.</a:t>
@@ -23333,6 +23502,7 @@
                   <a:srgbClr val="1B3B6F"/>
                 </a:solidFill>
                 <a:latin typeface="Amiri" pitchFamily="2" charset="-78"/>
+                <a:ea typeface="Amiri" pitchFamily="2" charset="-78"/>
                 <a:cs typeface="Amiri" pitchFamily="2" charset="-78"/>
               </a:rPr>
               <a:t>أُعْجَبُ بِجَدِّي كَثِيرًا، لِأَنَّهُ حَكِيمٌ وَلَطِيفٌ.</a:t>
@@ -23409,6 +23579,7 @@
                   <a:srgbClr val="1B3B6F"/>
                 </a:solidFill>
                 <a:latin typeface="Amiri" pitchFamily="2" charset="-78"/>
+                <a:ea typeface="Amiri" pitchFamily="2" charset="-78"/>
                 <a:cs typeface="Amiri" pitchFamily="2" charset="-78"/>
               </a:rPr>
               <a:t>مَنِ الشَّخْصُ الَّذِي تُعْجَبُ بِهِ؟</a:t>
@@ -23618,6 +23789,7 @@
                   <a:srgbClr val="D4AF37"/>
                 </a:solidFill>
                 <a:latin typeface="Amiri" pitchFamily="2" charset="-78"/>
+                <a:ea typeface="Amiri" pitchFamily="2" charset="-78"/>
                 <a:cs typeface="Amiri" pitchFamily="2" charset="-78"/>
               </a:rPr>
               <a:t>م</a:t>
@@ -23938,6 +24110,7 @@
                   <a:srgbClr val="8A6D1E"/>
                 </a:solidFill>
                 <a:latin typeface="Amiri" pitchFamily="2" charset="-78"/>
+                <a:ea typeface="Amiri" pitchFamily="2" charset="-78"/>
                 <a:cs typeface="Amiri" pitchFamily="2" charset="-78"/>
               </a:rPr>
               <a:t>نَمُوذَجُ الإِجَابَةِ</a:t>
@@ -24180,6 +24353,7 @@
                   <a:srgbClr val="1B3B6F"/>
                 </a:solidFill>
                 <a:latin typeface="Amiri" pitchFamily="2" charset="-78"/>
+                <a:ea typeface="Amiri" pitchFamily="2" charset="-78"/>
                 <a:cs typeface="Amiri" pitchFamily="2" charset="-78"/>
               </a:rPr>
               <a:t>صَدِيقِي حَمْزَةُ قَصِيرٌ قَلِيلًا وَشَعْرُهُ مُجَعَّدٌ، وَهُوَ مَرِحٌ جِدًّا وَيُضْحِكُ الصَّفَّ كُلَّهُ.</a:t>
@@ -24256,6 +24430,7 @@
                   <a:srgbClr val="1B3B6F"/>
                 </a:solidFill>
                 <a:latin typeface="Amiri" pitchFamily="2" charset="-78"/>
+                <a:ea typeface="Amiri" pitchFamily="2" charset="-78"/>
                 <a:cs typeface="Amiri" pitchFamily="2" charset="-78"/>
               </a:rPr>
               <a:t>صِفْ صَدِيقَكَ المُفَضَّلَ: شَكْلَهُ وَشَخْصِيَّتَهُ.</a:t>
@@ -24359,6 +24534,7 @@
                   <a:srgbClr val="1B3B6F"/>
                 </a:solidFill>
                 <a:latin typeface="Amiri" pitchFamily="2" charset="-78"/>
+                <a:ea typeface="Amiri" pitchFamily="2" charset="-78"/>
                 <a:cs typeface="Amiri" pitchFamily="2" charset="-78"/>
               </a:rPr>
               <a:t>لَا أُحِبُّ الكَذِبَ، لِأَنَّنِي لَا أَسْتَطِيعُ أَنْ أَثِقَ بِشَخْصٍ يَكْذِبُ.</a:t>
@@ -24435,6 +24611,7 @@
                   <a:srgbClr val="1B3B6F"/>
                 </a:solidFill>
                 <a:latin typeface="Amiri" pitchFamily="2" charset="-78"/>
+                <a:ea typeface="Amiri" pitchFamily="2" charset="-78"/>
                 <a:cs typeface="Amiri" pitchFamily="2" charset="-78"/>
               </a:rPr>
               <a:t>مَا الصِّفَةُ الَّتِي لَا تُحِبُّهَا فِي النَّاسِ؟</a:t>
@@ -24538,6 +24715,7 @@
                   <a:srgbClr val="1B3B6F"/>
                 </a:solidFill>
                 <a:latin typeface="Amiri" pitchFamily="2" charset="-78"/>
+                <a:ea typeface="Amiri" pitchFamily="2" charset="-78"/>
                 <a:cs typeface="Amiri" pitchFamily="2" charset="-78"/>
               </a:rPr>
               <a:t>كَانَ شَعْرِي طَوِيلًا وَأَشْقَرَ، أَمَّا الآنَ فَهُوَ قَصِيرٌ وَبُنِّيٌّ، وَصِرْتُ أَطْوَلَ مِنْ أَبِي!</a:t>
@@ -24614,6 +24792,7 @@
                   <a:srgbClr val="1B3B6F"/>
                 </a:solidFill>
                 <a:latin typeface="Amiri" pitchFamily="2" charset="-78"/>
+                <a:ea typeface="Amiri" pitchFamily="2" charset="-78"/>
                 <a:cs typeface="Amiri" pitchFamily="2" charset="-78"/>
               </a:rPr>
               <a:t>كَيْفَ تَغَيَّرَ شَكْلُكَ مُنْذُ كُنْتَ صَغِيرًا؟</a:t>
@@ -24717,6 +24896,7 @@
                   <a:srgbClr val="1B3B6F"/>
                 </a:solidFill>
                 <a:latin typeface="Amiri" pitchFamily="2" charset="-78"/>
+                <a:ea typeface="Amiri" pitchFamily="2" charset="-78"/>
                 <a:cs typeface="Amiri" pitchFamily="2" charset="-78"/>
               </a:rPr>
               <a:t>أُشْبِهُ أَبِي فِي شَكْلِي، لٰكِنَّ شَخْصِيَّتِي تُشْبِهُ شَخْصِيَّةَ أُمِّي، فَأَنَا هَادِئٌ مِثْلَهَا.</a:t>
@@ -24793,6 +24973,7 @@
                   <a:srgbClr val="1B3B6F"/>
                 </a:solidFill>
                 <a:latin typeface="Amiri" pitchFamily="2" charset="-78"/>
+                <a:ea typeface="Amiri" pitchFamily="2" charset="-78"/>
                 <a:cs typeface="Amiri" pitchFamily="2" charset="-78"/>
               </a:rPr>
               <a:t>هَلْ تُشْبِهُ أَحَدًا فِي أُسْرَتِكَ؟</a:t>
@@ -24896,6 +25077,7 @@
                   <a:srgbClr val="1B3B6F"/>
                 </a:solidFill>
                 <a:latin typeface="Amiri" pitchFamily="2" charset="-78"/>
+                <a:ea typeface="Amiri" pitchFamily="2" charset="-78"/>
                 <a:cs typeface="Amiri" pitchFamily="2" charset="-78"/>
               </a:rPr>
               <a:t>أُرِيدُ أَنْ أَكُونَ أَكْثَرَ ثِقَةً بِنَفْسِي، لِكَيْ أَتَكَلَّمَ فِي المُقَابَلَاتِ بِدُونِ خَوْفٍ.</a:t>
@@ -24972,6 +25154,7 @@
                   <a:srgbClr val="1B3B6F"/>
                 </a:solidFill>
                 <a:latin typeface="Amiri" pitchFamily="2" charset="-78"/>
+                <a:ea typeface="Amiri" pitchFamily="2" charset="-78"/>
                 <a:cs typeface="Amiri" pitchFamily="2" charset="-78"/>
               </a:rPr>
               <a:t>أَيَّ صِفَةٍ تُرِيدُ أَنْ تُطَوِّرَهَا فِي المُسْتَقْبَلِ؟</a:t>
@@ -25181,6 +25364,7 @@
                   <a:srgbClr val="D4AF37"/>
                 </a:solidFill>
                 <a:latin typeface="Amiri" pitchFamily="2" charset="-78"/>
+                <a:ea typeface="Amiri" pitchFamily="2" charset="-78"/>
                 <a:cs typeface="Amiri" pitchFamily="2" charset="-78"/>
               </a:rPr>
               <a:t>م</a:t>
@@ -25501,6 +25685,7 @@
                   <a:srgbClr val="8A6D1E"/>
                 </a:solidFill>
                 <a:latin typeface="Amiri" pitchFamily="2" charset="-78"/>
+                <a:ea typeface="Amiri" pitchFamily="2" charset="-78"/>
                 <a:cs typeface="Amiri" pitchFamily="2" charset="-78"/>
               </a:rPr>
               <a:t>نَمُوذَجُ الإِجَابَةِ</a:t>
@@ -25743,6 +25928,7 @@
                   <a:srgbClr val="1B3B6F"/>
                 </a:solidFill>
                 <a:latin typeface="Amiri" pitchFamily="2" charset="-78"/>
+                <a:ea typeface="Amiri" pitchFamily="2" charset="-78"/>
                 <a:cs typeface="Amiri" pitchFamily="2" charset="-78"/>
               </a:rPr>
               <a:t>أَعْتَقِدُ أَنَّ الشَّخْصِيَّةَ أَهَمُّ بِكَثِيرٍ، لِأَنَّ الجَمَالَ يَتَغَيَّرُ مَعَ العُمْرِ، أَمَّا الأَخْلَاقُ فَتَبْقَى.</a:t>
@@ -25819,6 +26005,7 @@
                   <a:srgbClr val="1B3B6F"/>
                 </a:solidFill>
                 <a:latin typeface="Amiri" pitchFamily="2" charset="-78"/>
+                <a:ea typeface="Amiri" pitchFamily="2" charset="-78"/>
                 <a:cs typeface="Amiri" pitchFamily="2" charset="-78"/>
               </a:rPr>
               <a:t>هَلِ الشَّخْصِيَّةُ أَهَمُّ مِنَ المَظْهَرِ؟</a:t>
@@ -25922,6 +26109,7 @@
                   <a:srgbClr val="1B3B6F"/>
                 </a:solidFill>
                 <a:latin typeface="Amiri" pitchFamily="2" charset="-78"/>
+                <a:ea typeface="Amiri" pitchFamily="2" charset="-78"/>
                 <a:cs typeface="Amiri" pitchFamily="2" charset="-78"/>
               </a:rPr>
               <a:t>القَائِدُ النَّاجِحُ هُوَ الَّذِي يَسْمَعُ لِلْآخَرِينَ، وَيَعْتَرِفُ بِأَخْطَائِهِ، وَلَا يَخَافُ مِنَ القَرَارَاتِ الصَّعْبَةِ.</a:t>
@@ -25998,6 +26186,7 @@
                   <a:srgbClr val="1B3B6F"/>
                 </a:solidFill>
                 <a:latin typeface="Amiri" pitchFamily="2" charset="-78"/>
+                <a:ea typeface="Amiri" pitchFamily="2" charset="-78"/>
                 <a:cs typeface="Amiri" pitchFamily="2" charset="-78"/>
               </a:rPr>
               <a:t>مَا صِفَاتُ القَائِدِ النَّاجِحِ؟</a:t>
@@ -26101,6 +26290,7 @@
                   <a:srgbClr val="1B3B6F"/>
                 </a:solidFill>
                 <a:latin typeface="Amiri" pitchFamily="2" charset="-78"/>
+                <a:ea typeface="Amiri" pitchFamily="2" charset="-78"/>
                 <a:cs typeface="Amiri" pitchFamily="2" charset="-78"/>
               </a:rPr>
               <a:t>نَعَمْ، فَأَنَا مَثَلًا كُنْتُ عَصَبِيًّا، أَمَّا الآنَ فَصِرْتُ أَهْدَأَ بَعْدَ أَنْ بَدَأْتُ أُمَارِسُ الرِّيَاضَةَ.</a:t>
@@ -26177,6 +26367,7 @@
                   <a:srgbClr val="1B3B6F"/>
                 </a:solidFill>
                 <a:latin typeface="Amiri" pitchFamily="2" charset="-78"/>
+                <a:ea typeface="Amiri" pitchFamily="2" charset="-78"/>
                 <a:cs typeface="Amiri" pitchFamily="2" charset="-78"/>
               </a:rPr>
               <a:t>هَلْ تَتَغَيَّرُ شَخْصِيَّةُ الإِنْسَانِ؟</a:t>
@@ -26386,6 +26577,7 @@
                   <a:srgbClr val="D4AF37"/>
                 </a:solidFill>
                 <a:latin typeface="Amiri" pitchFamily="2" charset="-78"/>
+                <a:ea typeface="Amiri" pitchFamily="2" charset="-78"/>
                 <a:cs typeface="Amiri" pitchFamily="2" charset="-78"/>
               </a:rPr>
               <a:t>م</a:t>
@@ -26706,6 +26898,7 @@
                   <a:srgbClr val="8A6D1E"/>
                 </a:solidFill>
                 <a:latin typeface="Amiri" pitchFamily="2" charset="-78"/>
+                <a:ea typeface="Amiri" pitchFamily="2" charset="-78"/>
                 <a:cs typeface="Amiri" pitchFamily="2" charset="-78"/>
               </a:rPr>
               <a:t>نَمُوذَجُ الإِجَابَةِ</a:t>
@@ -26948,6 +27141,7 @@
                   <a:srgbClr val="1B3B6F"/>
                 </a:solidFill>
                 <a:latin typeface="Amiri" pitchFamily="2" charset="-78"/>
+                <a:ea typeface="Amiri" pitchFamily="2" charset="-78"/>
                 <a:cs typeface="Amiri" pitchFamily="2" charset="-78"/>
               </a:rPr>
               <a:t>صَحِيحٌ أَنَّهَا تُظْهِرُ وُجُوهَهُمْ، غَيْرَ أَنَّهَا لَا تُظْهِرُ قُلُوبَهُمْ، كَمَا أَنَّ كَثِيرًا مِنْهَا مُعَدَّلٌ.</a:t>
@@ -27027,6 +27221,7 @@
                   <a:srgbClr val="1B3B6F"/>
                 </a:solidFill>
                 <a:latin typeface="Amiri" pitchFamily="2" charset="-78"/>
+                <a:ea typeface="Amiri" pitchFamily="2" charset="-78"/>
                 <a:cs typeface="Amiri" pitchFamily="2" charset="-78"/>
               </a:rPr>
               <a:t>هَلْ تُعْطِي الصُّوَرُ عَلَى الإِنْتَرْنِتِ صُورَةً صَادِقَةً عَنِ النَّاسِ؟</a:t>
@@ -27130,6 +27325,7 @@
                   <a:srgbClr val="1B3B6F"/>
                 </a:solidFill>
                 <a:latin typeface="Amiri" pitchFamily="2" charset="-78"/>
+                <a:ea typeface="Amiri" pitchFamily="2" charset="-78"/>
                 <a:cs typeface="Amiri" pitchFamily="2" charset="-78"/>
               </a:rPr>
               <a:t>لَوْ كُنْتُ شَخْصِيَّةً فِي رِوَايَةٍ، لَوَصَفَنِي الكَاتِبُ بِأَنِّي الصَّدِيقُ الهَادِئُ الَّذِي يَحُلُّ مَشَاكِلَ الجَمِيعِ.</a:t>
@@ -27206,6 +27402,7 @@
                   <a:srgbClr val="1B3B6F"/>
                 </a:solidFill>
                 <a:latin typeface="Amiri" pitchFamily="2" charset="-78"/>
+                <a:ea typeface="Amiri" pitchFamily="2" charset="-78"/>
                 <a:cs typeface="Amiri" pitchFamily="2" charset="-78"/>
               </a:rPr>
               <a:t>لَوْ كُنْتَ شَخْصِيَّةً فِي رِوَايَةٍ، كَيْفَ يَصِفُكَ الكَاتِبُ؟</a:t>
@@ -27415,6 +27612,7 @@
                   <a:srgbClr val="D4AF37"/>
                 </a:solidFill>
                 <a:latin typeface="Amiri" pitchFamily="2" charset="-78"/>
+                <a:ea typeface="Amiri" pitchFamily="2" charset="-78"/>
                 <a:cs typeface="Amiri" pitchFamily="2" charset="-78"/>
               </a:rPr>
               <a:t>م</a:t>
@@ -27735,6 +27933,7 @@
                   <a:srgbClr val="8A6D1E"/>
                 </a:solidFill>
                 <a:latin typeface="Amiri" pitchFamily="2" charset="-78"/>
+                <a:ea typeface="Amiri" pitchFamily="2" charset="-78"/>
                 <a:cs typeface="Amiri" pitchFamily="2" charset="-78"/>
               </a:rPr>
               <a:t>قَيِّمْ عَمَلَكَ</a:t>
@@ -28979,6 +29178,7 @@
                   <a:srgbClr val="FFFFFF"/>
                 </a:solidFill>
                 <a:latin typeface="Amiri" pitchFamily="2" charset="-78"/>
+                <a:ea typeface="Amiri" pitchFamily="2" charset="-78"/>
                 <a:cs typeface="Amiri" pitchFamily="2" charset="-78"/>
               </a:rPr>
               <a:t>أَحْسَنْتُمْ! إِلَى اللِّقَاءِ</a:t>
@@ -29131,6 +29331,7 @@
                   <a:srgbClr val="D4AF37"/>
                 </a:solidFill>
                 <a:latin typeface="Amiri" pitchFamily="2" charset="-78"/>
+                <a:ea typeface="Amiri" pitchFamily="2" charset="-78"/>
                 <a:cs typeface="Amiri" pitchFamily="2" charset="-78"/>
               </a:rPr>
               <a:t>وَرْشَةُ الكِتَابَةِ</a:t>
@@ -29264,6 +29465,7 @@
                   <a:srgbClr val="D4AF37"/>
                 </a:solidFill>
                 <a:latin typeface="Amiri" pitchFamily="2" charset="-78"/>
+                <a:ea typeface="Amiri" pitchFamily="2" charset="-78"/>
                 <a:cs typeface="Amiri" pitchFamily="2" charset="-78"/>
               </a:rPr>
               <a:t>م</a:t>
@@ -29584,6 +29786,7 @@
                   <a:srgbClr val="8A6D1E"/>
                 </a:solidFill>
                 <a:latin typeface="Amiri" pitchFamily="2" charset="-78"/>
+                <a:ea typeface="Amiri" pitchFamily="2" charset="-78"/>
                 <a:cs typeface="Amiri" pitchFamily="2" charset="-78"/>
               </a:rPr>
               <a:t>خَرِيطَةُ الوَرْشَةِ</a:t>
@@ -29898,6 +30101,7 @@
                   <a:srgbClr val="1B3B6F"/>
                 </a:solidFill>
                 <a:latin typeface="Amiri" pitchFamily="2" charset="-78"/>
+                <a:ea typeface="Amiri" pitchFamily="2" charset="-78"/>
                 <a:cs typeface="Amiri" pitchFamily="2" charset="-78"/>
               </a:rPr>
               <a:t>كَيْفَ</a:t>
@@ -30174,6 +30378,7 @@
                   <a:srgbClr val="1E6B52"/>
                 </a:solidFill>
                 <a:latin typeface="Amiri" pitchFamily="2" charset="-78"/>
+                <a:ea typeface="Amiri" pitchFamily="2" charset="-78"/>
                 <a:cs typeface="Amiri" pitchFamily="2" charset="-78"/>
               </a:rPr>
               <a:t>تَمْثِيلُ الدَّوْرِ</a:t>
@@ -30450,6 +30655,7 @@
                   <a:srgbClr val="8A6D1E"/>
                 </a:solidFill>
                 <a:latin typeface="Amiri" pitchFamily="2" charset="-78"/>
+                <a:ea typeface="Amiri" pitchFamily="2" charset="-78"/>
                 <a:cs typeface="Amiri" pitchFamily="2" charset="-78"/>
               </a:rPr>
               <a:t>النَّمُوذَجُ</a:t>
@@ -30726,6 +30932,7 @@
                   <a:srgbClr val="1E6B52"/>
                 </a:solidFill>
                 <a:latin typeface="Amiri" pitchFamily="2" charset="-78"/>
+                <a:ea typeface="Amiri" pitchFamily="2" charset="-78"/>
                 <a:cs typeface="Amiri" pitchFamily="2" charset="-78"/>
               </a:rPr>
               <a:t>المُحَادَثَةُ</a:t>
@@ -31002,6 +31209,7 @@
                   <a:srgbClr val="8A6D1E"/>
                 </a:solidFill>
                 <a:latin typeface="Amiri" pitchFamily="2" charset="-78"/>
+                <a:ea typeface="Amiri" pitchFamily="2" charset="-78"/>
                 <a:cs typeface="Amiri" pitchFamily="2" charset="-78"/>
               </a:rPr>
               <a:t>قَيِّمْ</a:t>
@@ -31245,6 +31453,7 @@
                   <a:srgbClr val="D4AF37"/>
                 </a:solidFill>
                 <a:latin typeface="Amiri" pitchFamily="2" charset="-78"/>
+                <a:ea typeface="Amiri" pitchFamily="2" charset="-78"/>
                 <a:cs typeface="Amiri" pitchFamily="2" charset="-78"/>
               </a:rPr>
               <a:t>م</a:t>
@@ -31565,6 +31774,7 @@
                   <a:srgbClr val="8A6D1E"/>
                 </a:solidFill>
                 <a:latin typeface="Amiri" pitchFamily="2" charset="-78"/>
+                <a:ea typeface="Amiri" pitchFamily="2" charset="-78"/>
                 <a:cs typeface="Amiri" pitchFamily="2" charset="-78"/>
               </a:rPr>
               <a:t>امْتِحَانُ التَّحَدُّثِ</a:t>
@@ -32189,6 +32399,7 @@
                   <a:srgbClr val="1B3B6F"/>
                 </a:solidFill>
                 <a:latin typeface="Amiri" pitchFamily="2" charset="-78"/>
+                <a:ea typeface="Amiri" pitchFamily="2" charset="-78"/>
                 <a:cs typeface="Amiri" pitchFamily="2" charset="-78"/>
               </a:rPr>
               <a:t>عَفْوًا، هَلْ يُمْكِنُ أَنْ تُعِيدَ السُّؤَالَ؟</a:t>
@@ -32288,6 +32499,7 @@
                   <a:srgbClr val="1B3B6F"/>
                 </a:solidFill>
                 <a:latin typeface="Amiri" pitchFamily="2" charset="-78"/>
+                <a:ea typeface="Amiri" pitchFamily="2" charset="-78"/>
                 <a:cs typeface="Amiri" pitchFamily="2" charset="-78"/>
               </a:rPr>
               <a:t>لَحْظَةً، دَعْنِي أُفَكِّرُ …</a:t>
@@ -32387,6 +32599,7 @@
                   <a:srgbClr val="1B3B6F"/>
                 </a:solidFill>
                 <a:latin typeface="Amiri" pitchFamily="2" charset="-78"/>
+                <a:ea typeface="Amiri" pitchFamily="2" charset="-78"/>
                 <a:cs typeface="Amiri" pitchFamily="2" charset="-78"/>
               </a:rPr>
               <a:t>أَقْصِدُ …</a:t>
@@ -32558,6 +32771,7 @@
                   <a:srgbClr val="D4AF37"/>
                 </a:solidFill>
                 <a:latin typeface="Amiri" pitchFamily="2" charset="-78"/>
+                <a:ea typeface="Amiri" pitchFamily="2" charset="-78"/>
                 <a:cs typeface="Amiri" pitchFamily="2" charset="-78"/>
               </a:rPr>
               <a:t>م</a:t>
@@ -32878,6 +33092,7 @@
                   <a:srgbClr val="8A6D1E"/>
                 </a:solidFill>
                 <a:latin typeface="Amiri" pitchFamily="2" charset="-78"/>
+                <a:ea typeface="Amiri" pitchFamily="2" charset="-78"/>
                 <a:cs typeface="Amiri" pitchFamily="2" charset="-78"/>
               </a:rPr>
               <a:t>كَيْفَ شَكْلُهُ؟</a:t>
@@ -33181,6 +33396,7 @@
                   <a:srgbClr val="1B3B6F"/>
                 </a:solidFill>
                 <a:latin typeface="Amiri" pitchFamily="2" charset="-78"/>
+                <a:ea typeface="Amiri" pitchFamily="2" charset="-78"/>
                 <a:cs typeface="Amiri" pitchFamily="2" charset="-78"/>
               </a:rPr>
               <a:t>طَوِيلٌ</a:t>
@@ -33338,6 +33554,7 @@
                   <a:srgbClr val="1B3B6F"/>
                 </a:solidFill>
                 <a:latin typeface="Amiri" pitchFamily="2" charset="-78"/>
+                <a:ea typeface="Amiri" pitchFamily="2" charset="-78"/>
                 <a:cs typeface="Amiri" pitchFamily="2" charset="-78"/>
               </a:rPr>
               <a:t>طِوَالٌ</a:t>
@@ -33441,6 +33658,7 @@
                   <a:srgbClr val="1B3B6F"/>
                 </a:solidFill>
                 <a:latin typeface="Amiri" pitchFamily="2" charset="-78"/>
+                <a:ea typeface="Amiri" pitchFamily="2" charset="-78"/>
                 <a:cs typeface="Amiri" pitchFamily="2" charset="-78"/>
               </a:rPr>
               <a:t>طَوِيلَةٌ</a:t>
@@ -33544,6 +33762,7 @@
                   <a:srgbClr val="1B3B6F"/>
                 </a:solidFill>
                 <a:latin typeface="Amiri" pitchFamily="2" charset="-78"/>
+                <a:ea typeface="Amiri" pitchFamily="2" charset="-78"/>
                 <a:cs typeface="Amiri" pitchFamily="2" charset="-78"/>
               </a:rPr>
               <a:t>طَوِيلٌ</a:t>
@@ -33809,6 +34028,7 @@
                   <a:srgbClr val="1B3B6F"/>
                 </a:solidFill>
                 <a:latin typeface="Amiri" pitchFamily="2" charset="-78"/>
+                <a:ea typeface="Amiri" pitchFamily="2" charset="-78"/>
                 <a:cs typeface="Amiri" pitchFamily="2" charset="-78"/>
               </a:rPr>
               <a:t>قَصِيرٌ</a:t>
@@ -33966,6 +34186,7 @@
                   <a:srgbClr val="1B3B6F"/>
                 </a:solidFill>
                 <a:latin typeface="Amiri" pitchFamily="2" charset="-78"/>
+                <a:ea typeface="Amiri" pitchFamily="2" charset="-78"/>
                 <a:cs typeface="Amiri" pitchFamily="2" charset="-78"/>
               </a:rPr>
               <a:t>قِصَارٌ</a:t>
@@ -34069,6 +34290,7 @@
                   <a:srgbClr val="1B3B6F"/>
                 </a:solidFill>
                 <a:latin typeface="Amiri" pitchFamily="2" charset="-78"/>
+                <a:ea typeface="Amiri" pitchFamily="2" charset="-78"/>
                 <a:cs typeface="Amiri" pitchFamily="2" charset="-78"/>
               </a:rPr>
               <a:t>قَصِيرَةٌ</a:t>
@@ -34172,6 +34394,7 @@
                   <a:srgbClr val="1B3B6F"/>
                 </a:solidFill>
                 <a:latin typeface="Amiri" pitchFamily="2" charset="-78"/>
+                <a:ea typeface="Amiri" pitchFamily="2" charset="-78"/>
                 <a:cs typeface="Amiri" pitchFamily="2" charset="-78"/>
               </a:rPr>
               <a:t>قَصِيرٌ</a:t>
@@ -34437,6 +34660,7 @@
                   <a:srgbClr val="1B3B6F"/>
                 </a:solidFill>
                 <a:latin typeface="Amiri" pitchFamily="2" charset="-78"/>
+                <a:ea typeface="Amiri" pitchFamily="2" charset="-78"/>
                 <a:cs typeface="Amiri" pitchFamily="2" charset="-78"/>
               </a:rPr>
               <a:t>شَعْرُهُ أَسْوَدُ</a:t>
@@ -34594,6 +34818,7 @@
                   <a:srgbClr val="1B3B6F"/>
                 </a:solidFill>
                 <a:latin typeface="Amiri" pitchFamily="2" charset="-78"/>
+                <a:ea typeface="Amiri" pitchFamily="2" charset="-78"/>
                 <a:cs typeface="Amiri" pitchFamily="2" charset="-78"/>
               </a:rPr>
               <a:t>شَعْرِي أَسْوَدُ</a:t>
@@ -34697,6 +34922,7 @@
                   <a:srgbClr val="1B3B6F"/>
                 </a:solidFill>
                 <a:latin typeface="Amiri" pitchFamily="2" charset="-78"/>
+                <a:ea typeface="Amiri" pitchFamily="2" charset="-78"/>
                 <a:cs typeface="Amiri" pitchFamily="2" charset="-78"/>
               </a:rPr>
               <a:t>شَعْرُهَا أَسْوَدُ</a:t>
@@ -34962,6 +35188,7 @@
                   <a:srgbClr val="1B3B6F"/>
                 </a:solidFill>
                 <a:latin typeface="Amiri" pitchFamily="2" charset="-78"/>
+                <a:ea typeface="Amiri" pitchFamily="2" charset="-78"/>
                 <a:cs typeface="Amiri" pitchFamily="2" charset="-78"/>
               </a:rPr>
               <a:t>عَيْنَاهُ بُنِّيَّتَانِ</a:t>
@@ -35119,6 +35346,7 @@
                   <a:srgbClr val="1B3B6F"/>
                 </a:solidFill>
                 <a:latin typeface="Amiri" pitchFamily="2" charset="-78"/>
+                <a:ea typeface="Amiri" pitchFamily="2" charset="-78"/>
                 <a:cs typeface="Amiri" pitchFamily="2" charset="-78"/>
               </a:rPr>
               <a:t>عَيْنَايَ</a:t>
@@ -35222,6 +35450,7 @@
                   <a:srgbClr val="1B3B6F"/>
                 </a:solidFill>
                 <a:latin typeface="Amiri" pitchFamily="2" charset="-78"/>
+                <a:ea typeface="Amiri" pitchFamily="2" charset="-78"/>
                 <a:cs typeface="Amiri" pitchFamily="2" charset="-78"/>
               </a:rPr>
               <a:t>عَيْنَاهَا</a:t>
@@ -35487,6 +35716,7 @@
                   <a:srgbClr val="1B3B6F"/>
                 </a:solidFill>
                 <a:latin typeface="Amiri" pitchFamily="2" charset="-78"/>
+                <a:ea typeface="Amiri" pitchFamily="2" charset="-78"/>
                 <a:cs typeface="Amiri" pitchFamily="2" charset="-78"/>
               </a:rPr>
               <a:t>يَلْبَسُ نَظَّارَةً</a:t>
@@ -35644,6 +35874,7 @@
                   <a:srgbClr val="1B3B6F"/>
                 </a:solidFill>
                 <a:latin typeface="Amiri" pitchFamily="2" charset="-78"/>
+                <a:ea typeface="Amiri" pitchFamily="2" charset="-78"/>
                 <a:cs typeface="Amiri" pitchFamily="2" charset="-78"/>
               </a:rPr>
               <a:t>أَلْبَسُ</a:t>
@@ -35747,6 +35978,7 @@
                   <a:srgbClr val="1B3B6F"/>
                 </a:solidFill>
                 <a:latin typeface="Amiri" pitchFamily="2" charset="-78"/>
+                <a:ea typeface="Amiri" pitchFamily="2" charset="-78"/>
                 <a:cs typeface="Amiri" pitchFamily="2" charset="-78"/>
               </a:rPr>
               <a:t>تَلْبَسُ</a:t>
@@ -36012,6 +36244,7 @@
                   <a:srgbClr val="1B3B6F"/>
                 </a:solidFill>
                 <a:latin typeface="Amiri" pitchFamily="2" charset="-78"/>
+                <a:ea typeface="Amiri" pitchFamily="2" charset="-78"/>
                 <a:cs typeface="Amiri" pitchFamily="2" charset="-78"/>
               </a:rPr>
               <a:t>لَيْسَ طَوِيلًا</a:t>
@@ -36169,6 +36402,7 @@
                   <a:srgbClr val="1B3B6F"/>
                 </a:solidFill>
                 <a:latin typeface="Amiri" pitchFamily="2" charset="-78"/>
+                <a:ea typeface="Amiri" pitchFamily="2" charset="-78"/>
                 <a:cs typeface="Amiri" pitchFamily="2" charset="-78"/>
               </a:rPr>
               <a:t>لَيْسُوا طِوَالًا</a:t>
@@ -36272,6 +36506,7 @@
                   <a:srgbClr val="1B3B6F"/>
                 </a:solidFill>
                 <a:latin typeface="Amiri" pitchFamily="2" charset="-78"/>
+                <a:ea typeface="Amiri" pitchFamily="2" charset="-78"/>
                 <a:cs typeface="Amiri" pitchFamily="2" charset="-78"/>
               </a:rPr>
               <a:t>لَسْتُ طَوِيلًا</a:t>
@@ -36375,6 +36610,7 @@
                   <a:srgbClr val="1B3B6F"/>
                 </a:solidFill>
                 <a:latin typeface="Amiri" pitchFamily="2" charset="-78"/>
+                <a:ea typeface="Amiri" pitchFamily="2" charset="-78"/>
                 <a:cs typeface="Amiri" pitchFamily="2" charset="-78"/>
               </a:rPr>
               <a:t>لَيْسَتْ طَوِيلَةً</a:t>
@@ -36508,6 +36744,7 @@
                   <a:srgbClr val="D4AF37"/>
                 </a:solidFill>
                 <a:latin typeface="Amiri" pitchFamily="2" charset="-78"/>
+                <a:ea typeface="Amiri" pitchFamily="2" charset="-78"/>
                 <a:cs typeface="Amiri" pitchFamily="2" charset="-78"/>
               </a:rPr>
               <a:t>م</a:t>
@@ -36828,6 +37065,7 @@
                   <a:srgbClr val="8A6D1E"/>
                 </a:solidFill>
                 <a:latin typeface="Amiri" pitchFamily="2" charset="-78"/>
+                <a:ea typeface="Amiri" pitchFamily="2" charset="-78"/>
                 <a:cs typeface="Amiri" pitchFamily="2" charset="-78"/>
               </a:rPr>
               <a:t>كَيْفَ شَخْصِيَّتُهَا؟</a:t>
@@ -37131,6 +37369,7 @@
                   <a:srgbClr val="1B3B6F"/>
                 </a:solidFill>
                 <a:latin typeface="Amiri" pitchFamily="2" charset="-78"/>
+                <a:ea typeface="Amiri" pitchFamily="2" charset="-78"/>
                 <a:cs typeface="Amiri" pitchFamily="2" charset="-78"/>
               </a:rPr>
               <a:t>لَطِيفٌ</a:t>
@@ -37288,6 +37527,7 @@
                   <a:srgbClr val="1B3B6F"/>
                 </a:solidFill>
                 <a:latin typeface="Amiri" pitchFamily="2" charset="-78"/>
+                <a:ea typeface="Amiri" pitchFamily="2" charset="-78"/>
                 <a:cs typeface="Amiri" pitchFamily="2" charset="-78"/>
               </a:rPr>
               <a:t>لُطَفَاءُ</a:t>
@@ -37391,6 +37631,7 @@
                   <a:srgbClr val="1B3B6F"/>
                 </a:solidFill>
                 <a:latin typeface="Amiri" pitchFamily="2" charset="-78"/>
+                <a:ea typeface="Amiri" pitchFamily="2" charset="-78"/>
                 <a:cs typeface="Amiri" pitchFamily="2" charset="-78"/>
               </a:rPr>
               <a:t>لَطِيفَةٌ</a:t>
@@ -37494,6 +37735,7 @@
                   <a:srgbClr val="1B3B6F"/>
                 </a:solidFill>
                 <a:latin typeface="Amiri" pitchFamily="2" charset="-78"/>
+                <a:ea typeface="Amiri" pitchFamily="2" charset="-78"/>
                 <a:cs typeface="Amiri" pitchFamily="2" charset="-78"/>
               </a:rPr>
               <a:t>لَطِيفٌ</a:t>
@@ -37759,6 +38001,7 @@
                   <a:srgbClr val="1B3B6F"/>
                 </a:solidFill>
                 <a:latin typeface="Amiri" pitchFamily="2" charset="-78"/>
+                <a:ea typeface="Amiri" pitchFamily="2" charset="-78"/>
                 <a:cs typeface="Amiri" pitchFamily="2" charset="-78"/>
               </a:rPr>
               <a:t>ذَكِيٌّ</a:t>
@@ -37916,6 +38159,7 @@
                   <a:srgbClr val="1B3B6F"/>
                 </a:solidFill>
                 <a:latin typeface="Amiri" pitchFamily="2" charset="-78"/>
+                <a:ea typeface="Amiri" pitchFamily="2" charset="-78"/>
                 <a:cs typeface="Amiri" pitchFamily="2" charset="-78"/>
               </a:rPr>
               <a:t>أَذْكِيَاءُ</a:t>
@@ -38019,6 +38263,7 @@
                   <a:srgbClr val="1B3B6F"/>
                 </a:solidFill>
                 <a:latin typeface="Amiri" pitchFamily="2" charset="-78"/>
+                <a:ea typeface="Amiri" pitchFamily="2" charset="-78"/>
                 <a:cs typeface="Amiri" pitchFamily="2" charset="-78"/>
               </a:rPr>
               <a:t>ذَكِيَّةٌ</a:t>
@@ -38122,6 +38367,7 @@
                   <a:srgbClr val="1B3B6F"/>
                 </a:solidFill>
                 <a:latin typeface="Amiri" pitchFamily="2" charset="-78"/>
+                <a:ea typeface="Amiri" pitchFamily="2" charset="-78"/>
                 <a:cs typeface="Amiri" pitchFamily="2" charset="-78"/>
               </a:rPr>
               <a:t>ذَكِيٌّ</a:t>
@@ -38387,6 +38633,7 @@
                   <a:srgbClr val="1B3B6F"/>
                 </a:solidFill>
                 <a:latin typeface="Amiri" pitchFamily="2" charset="-78"/>
+                <a:ea typeface="Amiri" pitchFamily="2" charset="-78"/>
                 <a:cs typeface="Amiri" pitchFamily="2" charset="-78"/>
               </a:rPr>
               <a:t>خَجُولٌ</a:t>
@@ -38544,6 +38791,7 @@
                   <a:srgbClr val="1B3B6F"/>
                 </a:solidFill>
                 <a:latin typeface="Amiri" pitchFamily="2" charset="-78"/>
+                <a:ea typeface="Amiri" pitchFamily="2" charset="-78"/>
                 <a:cs typeface="Amiri" pitchFamily="2" charset="-78"/>
               </a:rPr>
               <a:t>خَجُولُونَ</a:t>
@@ -38647,6 +38895,7 @@
                   <a:srgbClr val="1B3B6F"/>
                 </a:solidFill>
                 <a:latin typeface="Amiri" pitchFamily="2" charset="-78"/>
+                <a:ea typeface="Amiri" pitchFamily="2" charset="-78"/>
                 <a:cs typeface="Amiri" pitchFamily="2" charset="-78"/>
               </a:rPr>
               <a:t>خَجُولَةٌ</a:t>
@@ -38750,6 +38999,7 @@
                   <a:srgbClr val="1B3B6F"/>
                 </a:solidFill>
                 <a:latin typeface="Amiri" pitchFamily="2" charset="-78"/>
+                <a:ea typeface="Amiri" pitchFamily="2" charset="-78"/>
                 <a:cs typeface="Amiri" pitchFamily="2" charset="-78"/>
               </a:rPr>
               <a:t>خَجُولٌ</a:t>
@@ -39015,6 +39265,7 @@
                   <a:srgbClr val="1B3B6F"/>
                 </a:solidFill>
                 <a:latin typeface="Amiri" pitchFamily="2" charset="-78"/>
+                <a:ea typeface="Amiri" pitchFamily="2" charset="-78"/>
                 <a:cs typeface="Amiri" pitchFamily="2" charset="-78"/>
               </a:rPr>
               <a:t>كَرِيمٌ</a:t>
@@ -39172,6 +39423,7 @@
                   <a:srgbClr val="1B3B6F"/>
                 </a:solidFill>
                 <a:latin typeface="Amiri" pitchFamily="2" charset="-78"/>
+                <a:ea typeface="Amiri" pitchFamily="2" charset="-78"/>
                 <a:cs typeface="Amiri" pitchFamily="2" charset="-78"/>
               </a:rPr>
               <a:t>كِرَامٌ</a:t>
@@ -39275,6 +39527,7 @@
                   <a:srgbClr val="1B3B6F"/>
                 </a:solidFill>
                 <a:latin typeface="Amiri" pitchFamily="2" charset="-78"/>
+                <a:ea typeface="Amiri" pitchFamily="2" charset="-78"/>
                 <a:cs typeface="Amiri" pitchFamily="2" charset="-78"/>
               </a:rPr>
               <a:t>كَرِيمَةٌ</a:t>
@@ -39378,6 +39631,7 @@
                   <a:srgbClr val="1B3B6F"/>
                 </a:solidFill>
                 <a:latin typeface="Amiri" pitchFamily="2" charset="-78"/>
+                <a:ea typeface="Amiri" pitchFamily="2" charset="-78"/>
                 <a:cs typeface="Amiri" pitchFamily="2" charset="-78"/>
               </a:rPr>
               <a:t>كَرِيمٌ</a:t>
@@ -39643,6 +39897,7 @@
                   <a:srgbClr val="1B3B6F"/>
                 </a:solidFill>
                 <a:latin typeface="Amiri" pitchFamily="2" charset="-78"/>
+                <a:ea typeface="Amiri" pitchFamily="2" charset="-78"/>
                 <a:cs typeface="Amiri" pitchFamily="2" charset="-78"/>
               </a:rPr>
               <a:t>الَّذِي · الَّتِي</a:t>
@@ -39692,11 +39947,12 @@
               <a:buNone/>
             </a:pPr>
             <a:r>
-              <a:rPr lang="en-US" sz="1100" i="1" dirty="0">
+              <a:rPr lang="ar-SA" sz="1100" i="1" dirty="0">
                 <a:solidFill>
                   <a:srgbClr val="5A6472"/>
                 </a:solidFill>
                 <a:latin typeface="Calibri" pitchFamily="34" charset="0"/>
+                <a:ea typeface="Amiri" pitchFamily="2" charset="-78"/>
                 <a:cs typeface="Amiri" pitchFamily="2" charset="-78"/>
               </a:rPr>
               <a:t>al-َ-dhī · al-َ-tī</a:t>
@@ -39800,6 +40056,7 @@
                   <a:srgbClr val="1B3B6F"/>
                 </a:solidFill>
                 <a:latin typeface="Amiri" pitchFamily="2" charset="-78"/>
+                <a:ea typeface="Amiri" pitchFamily="2" charset="-78"/>
                 <a:cs typeface="Amiri" pitchFamily="2" charset="-78"/>
               </a:rPr>
               <a:t>اللَّوَاتِي</a:t>
@@ -39903,6 +40160,7 @@
                   <a:srgbClr val="1B3B6F"/>
                 </a:solidFill>
                 <a:latin typeface="Amiri" pitchFamily="2" charset="-78"/>
+                <a:ea typeface="Amiri" pitchFamily="2" charset="-78"/>
                 <a:cs typeface="Amiri" pitchFamily="2" charset="-78"/>
               </a:rPr>
               <a:t>الَّذِينَ</a:t>
@@ -40168,6 +40426,7 @@
                   <a:srgbClr val="1B3B6F"/>
                 </a:solidFill>
                 <a:latin typeface="Amiri" pitchFamily="2" charset="-78"/>
+                <a:ea typeface="Amiri" pitchFamily="2" charset="-78"/>
                 <a:cs typeface="Amiri" pitchFamily="2" charset="-78"/>
               </a:rPr>
               <a:t>صَبُورٌ</a:t>
@@ -40325,6 +40584,7 @@
                   <a:srgbClr val="1B3B6F"/>
                 </a:solidFill>
                 <a:latin typeface="Amiri" pitchFamily="2" charset="-78"/>
+                <a:ea typeface="Amiri" pitchFamily="2" charset="-78"/>
                 <a:cs typeface="Amiri" pitchFamily="2" charset="-78"/>
               </a:rPr>
               <a:t>صُبُرٌ</a:t>
@@ -40428,6 +40688,7 @@
                   <a:srgbClr val="1B3B6F"/>
                 </a:solidFill>
                 <a:latin typeface="Amiri" pitchFamily="2" charset="-78"/>
+                <a:ea typeface="Amiri" pitchFamily="2" charset="-78"/>
                 <a:cs typeface="Amiri" pitchFamily="2" charset="-78"/>
               </a:rPr>
               <a:t>صَبُورَةٌ</a:t>
@@ -40531,6 +40792,7 @@
                   <a:srgbClr val="1B3B6F"/>
                 </a:solidFill>
                 <a:latin typeface="Amiri" pitchFamily="2" charset="-78"/>
+                <a:ea typeface="Amiri" pitchFamily="2" charset="-78"/>
                 <a:cs typeface="Amiri" pitchFamily="2" charset="-78"/>
               </a:rPr>
               <a:t>صَبُورٌ</a:t>
@@ -40664,6 +40926,7 @@
                   <a:srgbClr val="D4AF37"/>
                 </a:solidFill>
                 <a:latin typeface="Amiri" pitchFamily="2" charset="-78"/>
+                <a:ea typeface="Amiri" pitchFamily="2" charset="-78"/>
                 <a:cs typeface="Amiri" pitchFamily="2" charset="-78"/>
               </a:rPr>
               <a:t>م</a:t>
@@ -40984,6 +41247,7 @@
                   <a:srgbClr val="8A6D1E"/>
                 </a:solidFill>
                 <a:latin typeface="Amiri" pitchFamily="2" charset="-78"/>
+                <a:ea typeface="Amiri" pitchFamily="2" charset="-78"/>
                 <a:cs typeface="Amiri" pitchFamily="2" charset="-78"/>
               </a:rPr>
               <a:t>فِي الغُرَفِ</a:t>
@@ -42160,6 +42424,7 @@
                   <a:srgbClr val="1B3B6F"/>
                 </a:solidFill>
                 <a:latin typeface="Amiri" pitchFamily="2" charset="-78"/>
+                <a:ea typeface="Amiri" pitchFamily="2" charset="-78"/>
                 <a:cs typeface="Amiri" pitchFamily="2" charset="-78"/>
               </a:rPr>
               <a:t>دَوْرُكَ!</a:t>
@@ -42236,6 +42501,7 @@
                   <a:srgbClr val="1B3B6F"/>
                 </a:solidFill>
                 <a:latin typeface="Amiri" pitchFamily="2" charset="-78"/>
+                <a:ea typeface="Amiri" pitchFamily="2" charset="-78"/>
                 <a:cs typeface="Amiri" pitchFamily="2" charset="-78"/>
               </a:rPr>
               <a:t>أَحْسَنْتَ! / أَحْسَنْتِ!</a:t>
@@ -42312,6 +42578,7 @@
                   <a:srgbClr val="1B3B6F"/>
                 </a:solidFill>
                 <a:latin typeface="Amiri" pitchFamily="2" charset="-78"/>
+                <a:ea typeface="Amiri" pitchFamily="2" charset="-78"/>
                 <a:cs typeface="Amiri" pitchFamily="2" charset="-78"/>
               </a:rPr>
               <a:t>تَكَلَّمْ أَكْثَرَ، مِنْ فَضْلِكَ</a:t>
@@ -42388,6 +42655,7 @@
                   <a:srgbClr val="1B3B6F"/>
                 </a:solidFill>
                 <a:latin typeface="Amiri" pitchFamily="2" charset="-78"/>
+                <a:ea typeface="Amiri" pitchFamily="2" charset="-78"/>
                 <a:cs typeface="Amiri" pitchFamily="2" charset="-78"/>
               </a:rPr>
               <a:t>لِمَاذَا؟</a:t>
@@ -42559,6 +42827,7 @@
                   <a:srgbClr val="D4AF37"/>
                 </a:solidFill>
                 <a:latin typeface="Amiri" pitchFamily="2" charset="-78"/>
+                <a:ea typeface="Amiri" pitchFamily="2" charset="-78"/>
                 <a:cs typeface="Amiri" pitchFamily="2" charset="-78"/>
               </a:rPr>
               <a:t>م</a:t>
@@ -42879,6 +43148,7 @@
                   <a:srgbClr val="8A6D1E"/>
                 </a:solidFill>
                 <a:latin typeface="Amiri" pitchFamily="2" charset="-78"/>
+                <a:ea typeface="Amiri" pitchFamily="2" charset="-78"/>
                 <a:cs typeface="Amiri" pitchFamily="2" charset="-78"/>
               </a:rPr>
               <a:t>أَخِي الصَّغِيرُ ضَائِعٌ</a:t>
@@ -43159,6 +43429,7 @@
                   <a:srgbClr val="1B3B6F"/>
                 </a:solidFill>
                 <a:latin typeface="Amiri" pitchFamily="2" charset="-78"/>
+                <a:ea typeface="Amiri" pitchFamily="2" charset="-78"/>
                 <a:cs typeface="Amiri" pitchFamily="2" charset="-78"/>
               </a:rPr>
               <a:t>أَخِي الصَّغِيرُ ضَائِعٌ …</a:t>
@@ -43235,6 +43506,7 @@
                   <a:srgbClr val="1B3B6F"/>
                 </a:solidFill>
                 <a:latin typeface="Amiri" pitchFamily="2" charset="-78"/>
+                <a:ea typeface="Amiri" pitchFamily="2" charset="-78"/>
                 <a:cs typeface="Amiri" pitchFamily="2" charset="-78"/>
               </a:rPr>
               <a:t>مَا المُشْكِلَةُ؟</a:t>
@@ -43403,6 +43675,7 @@
                   <a:srgbClr val="1B3B6F"/>
                 </a:solidFill>
                 <a:latin typeface="Amiri" pitchFamily="2" charset="-78"/>
+                <a:ea typeface="Amiri" pitchFamily="2" charset="-78"/>
                 <a:cs typeface="Amiri" pitchFamily="2" charset="-78"/>
               </a:rPr>
               <a:t>اسْمُهُ … وَعُمْرُهُ …</a:t>
@@ -43479,6 +43752,7 @@
                   <a:srgbClr val="1B3B6F"/>
                 </a:solidFill>
                 <a:latin typeface="Amiri" pitchFamily="2" charset="-78"/>
+                <a:ea typeface="Amiri" pitchFamily="2" charset="-78"/>
                 <a:cs typeface="Amiri" pitchFamily="2" charset="-78"/>
               </a:rPr>
               <a:t>كَمْ عُمْرُهُ؟ وَمَا اسْمُهُ؟</a:t>
@@ -43647,6 +43921,7 @@
                   <a:srgbClr val="1B3B6F"/>
                 </a:solidFill>
                 <a:latin typeface="Amiri" pitchFamily="2" charset="-78"/>
+                <a:ea typeface="Amiri" pitchFamily="2" charset="-78"/>
                 <a:cs typeface="Amiri" pitchFamily="2" charset="-78"/>
               </a:rPr>
               <a:t>هُوَ … وَشَعْرُهُ …</a:t>
@@ -43723,6 +43998,7 @@
                   <a:srgbClr val="1B3B6F"/>
                 </a:solidFill>
                 <a:latin typeface="Amiri" pitchFamily="2" charset="-78"/>
+                <a:ea typeface="Amiri" pitchFamily="2" charset="-78"/>
                 <a:cs typeface="Amiri" pitchFamily="2" charset="-78"/>
               </a:rPr>
               <a:t>كَيْفَ شَكْلُهُ؟</a:t>
@@ -43891,6 +44167,7 @@
                   <a:srgbClr val="1B3B6F"/>
                 </a:solidFill>
                 <a:latin typeface="Amiri" pitchFamily="2" charset="-78"/>
+                <a:ea typeface="Amiri" pitchFamily="2" charset="-78"/>
                 <a:cs typeface="Amiri" pitchFamily="2" charset="-78"/>
               </a:rPr>
               <a:t>يَلْبَسُ … وَ…</a:t>
@@ -43967,6 +44244,7 @@
                   <a:srgbClr val="1B3B6F"/>
                 </a:solidFill>
                 <a:latin typeface="Amiri" pitchFamily="2" charset="-78"/>
+                <a:ea typeface="Amiri" pitchFamily="2" charset="-78"/>
                 <a:cs typeface="Amiri" pitchFamily="2" charset="-78"/>
               </a:rPr>
               <a:t>مَاذَا يَلْبَسُ؟</a:t>
@@ -44135,6 +44413,7 @@
                   <a:srgbClr val="1B3B6F"/>
                 </a:solidFill>
                 <a:latin typeface="Amiri" pitchFamily="2" charset="-78"/>
+                <a:ea typeface="Amiri" pitchFamily="2" charset="-78"/>
                 <a:cs typeface="Amiri" pitchFamily="2" charset="-78"/>
               </a:rPr>
               <a:t>لَا، لَيْسَ … هُوَ …</a:t>
@@ -44211,6 +44490,7 @@
                   <a:srgbClr val="1B3B6F"/>
                 </a:solidFill>
                 <a:latin typeface="Amiri" pitchFamily="2" charset="-78"/>
+                <a:ea typeface="Amiri" pitchFamily="2" charset="-78"/>
                 <a:cs typeface="Amiri" pitchFamily="2" charset="-78"/>
               </a:rPr>
               <a:t>هَلْ هُوَ خَجُولٌ؟</a:t>
@@ -44485,6 +44765,7 @@
                   <a:srgbClr val="D4AF37"/>
                 </a:solidFill>
                 <a:latin typeface="Amiri" pitchFamily="2" charset="-78"/>
+                <a:ea typeface="Amiri" pitchFamily="2" charset="-78"/>
                 <a:cs typeface="Amiri" pitchFamily="2" charset="-78"/>
               </a:rPr>
               <a:t>م</a:t>
@@ -44805,6 +45086,7 @@
                   <a:srgbClr val="8A6D1E"/>
                 </a:solidFill>
                 <a:latin typeface="Amiri" pitchFamily="2" charset="-78"/>
+                <a:ea typeface="Amiri" pitchFamily="2" charset="-78"/>
                 <a:cs typeface="Amiri" pitchFamily="2" charset="-78"/>
               </a:rPr>
               <a:t>مُعَلِّمَتُنَا الجَدِيدَةُ</a:t>
@@ -45085,6 +45367,7 @@
                   <a:srgbClr val="1B3B6F"/>
                 </a:solidFill>
                 <a:latin typeface="Amiri" pitchFamily="2" charset="-78"/>
+                <a:ea typeface="Amiri" pitchFamily="2" charset="-78"/>
                 <a:cs typeface="Amiri" pitchFamily="2" charset="-78"/>
               </a:rPr>
               <a:t>اسْمُهَا … وَهِيَ تُدَرِّسُ …</a:t>
@@ -45161,6 +45444,7 @@
                   <a:srgbClr val="1B3B6F"/>
                 </a:solidFill>
                 <a:latin typeface="Amiri" pitchFamily="2" charset="-78"/>
+                <a:ea typeface="Amiri" pitchFamily="2" charset="-78"/>
                 <a:cs typeface="Amiri" pitchFamily="2" charset="-78"/>
               </a:rPr>
               <a:t>مَنْ مُعَلِّمَتُكُمُ الجَدِيدَةُ؟</a:t>
@@ -45329,6 +45613,7 @@
                   <a:srgbClr val="1B3B6F"/>
                 </a:solidFill>
                 <a:latin typeface="Amiri" pitchFamily="2" charset="-78"/>
+                <a:ea typeface="Amiri" pitchFamily="2" charset="-78"/>
                 <a:cs typeface="Amiri" pitchFamily="2" charset="-78"/>
               </a:rPr>
               <a:t>هِيَ … وَتَلْبَسُ …</a:t>
@@ -45405,6 +45690,7 @@
                   <a:srgbClr val="1B3B6F"/>
                 </a:solidFill>
                 <a:latin typeface="Amiri" pitchFamily="2" charset="-78"/>
+                <a:ea typeface="Amiri" pitchFamily="2" charset="-78"/>
                 <a:cs typeface="Amiri" pitchFamily="2" charset="-78"/>
               </a:rPr>
               <a:t>كَيْفَ شَكْلُهَا؟</a:t>
@@ -45573,6 +45859,7 @@
                   <a:srgbClr val="1B3B6F"/>
                 </a:solidFill>
                 <a:latin typeface="Amiri" pitchFamily="2" charset="-78"/>
+                <a:ea typeface="Amiri" pitchFamily="2" charset="-78"/>
                 <a:cs typeface="Amiri" pitchFamily="2" charset="-78"/>
               </a:rPr>
               <a:t>لَا، لَيْسَتْ … بَلْ …</a:t>
@@ -45649,6 +45936,7 @@
                   <a:srgbClr val="1B3B6F"/>
                 </a:solidFill>
                 <a:latin typeface="Amiri" pitchFamily="2" charset="-78"/>
+                <a:ea typeface="Amiri" pitchFamily="2" charset="-78"/>
                 <a:cs typeface="Amiri" pitchFamily="2" charset="-78"/>
               </a:rPr>
               <a:t>وَهَلْ هِيَ صَارِمَةٌ؟</a:t>
@@ -45752,6 +46040,7 @@
                   <a:srgbClr val="1B3B6F"/>
                 </a:solidFill>
                 <a:latin typeface="Amiri" pitchFamily="2" charset="-78"/>
+                <a:ea typeface="Amiri" pitchFamily="2" charset="-78"/>
                 <a:cs typeface="Amiri" pitchFamily="2" charset="-78"/>
               </a:rPr>
               <a:t>وَأَنْتَ / وَأَنْتِ، مَنْ …؟</a:t>
@@ -45828,6 +46117,7 @@
                   <a:srgbClr val="1B3B6F"/>
                 </a:solidFill>
                 <a:latin typeface="Amiri" pitchFamily="2" charset="-78"/>
+                <a:ea typeface="Amiri" pitchFamily="2" charset="-78"/>
                 <a:cs typeface="Amiri" pitchFamily="2" charset="-78"/>
               </a:rPr>
               <a:t>… مُعَلِّمُكَ القَدِيمُ كَانَ صَارِمًا جِدًّا!</a:t>
@@ -45931,6 +46221,7 @@
                   <a:srgbClr val="1B3B6F"/>
                 </a:solidFill>
                 <a:latin typeface="Amiri" pitchFamily="2" charset="-78"/>
+                <a:ea typeface="Amiri" pitchFamily="2" charset="-78"/>
                 <a:cs typeface="Amiri" pitchFamily="2" charset="-78"/>
               </a:rPr>
               <a:t>لِأَنَّهَا … مَثَلًا …</a:t>
@@ -46007,6 +46298,7 @@
                   <a:srgbClr val="1B3B6F"/>
                 </a:solidFill>
                 <a:latin typeface="Amiri" pitchFamily="2" charset="-78"/>
+                <a:ea typeface="Amiri" pitchFamily="2" charset="-78"/>
                 <a:cs typeface="Amiri" pitchFamily="2" charset="-78"/>
               </a:rPr>
               <a:t>لِمَاذَا تُحِبُّهَا؟</a:t>
@@ -46181,13 +46473,9 @@
     <a:fontScheme name="Office">
       <a:majorFont>
         <a:latin typeface="Calibri Light" panose="020F0302020204030204"/>
-        <a:ea typeface=""/>
-        <a:cs typeface=""/>
-        <a:font script="Jpan" typeface="游ゴシック Light"/>
-        <a:font script="Hang" typeface="맑은 고딕"/>
-        <a:font script="Hans" typeface="等线 Light"/>
-        <a:font script="Hant" typeface="新細明體"/>
-        <a:font script="Arab" typeface="Times New Roman"/>
+        <a:ea typeface="Amiri" pitchFamily="2" charset="-78"/>
+        <a:cs typeface="Amiri" pitchFamily="2" charset="-78"/>
+        <a:font script="Arab" typeface="Amiri"/>
         <a:font script="Hebr" typeface="Times New Roman"/>
         <a:font script="Thai" typeface="Angsana New"/>
         <a:font script="Ethi" typeface="Nyala"/>
@@ -46233,13 +46521,9 @@
       </a:majorFont>
       <a:minorFont>
         <a:latin typeface="Calibri" panose="020F0502020204030204"/>
-        <a:ea typeface=""/>
-        <a:cs typeface=""/>
-        <a:font script="Jpan" typeface="游ゴシック"/>
-        <a:font script="Hang" typeface="맑은 고딕"/>
-        <a:font script="Hans" typeface="等线"/>
-        <a:font script="Hant" typeface="新細明體"/>
-        <a:font script="Arab" typeface="Arial"/>
+        <a:ea typeface="Amiri" pitchFamily="2" charset="-78"/>
+        <a:cs typeface="Amiri" pitchFamily="2" charset="-78"/>
+        <a:font script="Arab" typeface="Amiri"/>
         <a:font script="Hebr" typeface="Arial"/>
         <a:font script="Thai" typeface="Cordia New"/>
         <a:font script="Ethi" typeface="Nyala"/>
